--- a/발표 자료/개인별 ppt/이현겸_ppt.pptx
+++ b/발표 자료/개인별 ppt/이현겸_ppt.pptx
@@ -8,12 +8,13 @@
     <p:sldId id="257" r:id="rId2"/>
     <p:sldId id="258" r:id="rId3"/>
     <p:sldId id="256" r:id="rId4"/>
-    <p:sldId id="259" r:id="rId5"/>
-    <p:sldId id="260" r:id="rId6"/>
-    <p:sldId id="262" r:id="rId7"/>
-    <p:sldId id="263" r:id="rId8"/>
-    <p:sldId id="264" r:id="rId9"/>
-    <p:sldId id="265" r:id="rId10"/>
+    <p:sldId id="266" r:id="rId5"/>
+    <p:sldId id="259" r:id="rId6"/>
+    <p:sldId id="260" r:id="rId7"/>
+    <p:sldId id="262" r:id="rId8"/>
+    <p:sldId id="263" r:id="rId9"/>
+    <p:sldId id="264" r:id="rId10"/>
+    <p:sldId id="265" r:id="rId11"/>
   </p:sldIdLst>
   <p:sldSz cx="12192000" cy="6858000"/>
   <p:notesSz cx="6858000" cy="9144000"/>
@@ -3895,6 +3896,1477 @@
 </p:sld>
 </file>
 
+<file path=ppt/slides/slide10.xml><?xml version="1.0" encoding="utf-8"?>
+<p:sld xmlns:a="http://schemas.openxmlformats.org/drawingml/2006/main" xmlns:r="http://schemas.openxmlformats.org/officeDocument/2006/relationships" xmlns:p="http://schemas.openxmlformats.org/presentationml/2006/main">
+  <p:cSld>
+    <p:bg>
+      <p:bgPr>
+        <a:solidFill>
+          <a:srgbClr val="0B0C17"/>
+        </a:solidFill>
+        <a:effectLst/>
+      </p:bgPr>
+    </p:bg>
+    <p:spTree>
+      <p:nvGrpSpPr>
+        <p:cNvPr id="1" name="">
+          <a:extLst>
+            <a:ext uri="{FF2B5EF4-FFF2-40B4-BE49-F238E27FC236}">
+              <a16:creationId xmlns:a16="http://schemas.microsoft.com/office/drawing/2014/main" id="{0036CBCD-7B58-7C3D-FCC0-A88B3544A6A8}"/>
+            </a:ext>
+          </a:extLst>
+        </p:cNvPr>
+        <p:cNvGrpSpPr/>
+        <p:nvPr/>
+      </p:nvGrpSpPr>
+      <p:grpSpPr>
+        <a:xfrm>
+          <a:off x="0" y="0"/>
+          <a:ext cx="0" cy="0"/>
+          <a:chOff x="0" y="0"/>
+          <a:chExt cx="0" cy="0"/>
+        </a:xfrm>
+      </p:grpSpPr>
+      <p:pic>
+        <p:nvPicPr>
+          <p:cNvPr id="5" name="그림 4" descr="텍스트, 스크린샷, 소프트웨어, 멀티미디어 소프트웨어이(가) 표시된 사진&#10;&#10;AI 생성 콘텐츠는 정확하지 않을 수 있습니다.">
+            <a:extLst>
+              <a:ext uri="{FF2B5EF4-FFF2-40B4-BE49-F238E27FC236}">
+                <a16:creationId xmlns:a16="http://schemas.microsoft.com/office/drawing/2014/main" id="{1D38BDBA-FE03-E406-D651-6369B8F5C404}"/>
+              </a:ext>
+            </a:extLst>
+          </p:cNvPr>
+          <p:cNvPicPr>
+            <a:picLocks noChangeAspect="1"/>
+          </p:cNvPicPr>
+          <p:nvPr/>
+        </p:nvPicPr>
+        <p:blipFill>
+          <a:blip r:embed="rId2"/>
+          <a:srcRect l="13004" r="12123"/>
+          <a:stretch>
+            <a:fillRect/>
+          </a:stretch>
+        </p:blipFill>
+        <p:spPr>
+          <a:xfrm>
+            <a:off x="0" y="1673772"/>
+            <a:ext cx="7609722" cy="5025715"/>
+          </a:xfrm>
+          <a:prstGeom prst="rect">
+            <a:avLst/>
+          </a:prstGeom>
+        </p:spPr>
+      </p:pic>
+      <p:sp>
+        <p:nvSpPr>
+          <p:cNvPr id="8" name="TextBox 7">
+            <a:extLst>
+              <a:ext uri="{FF2B5EF4-FFF2-40B4-BE49-F238E27FC236}">
+                <a16:creationId xmlns:a16="http://schemas.microsoft.com/office/drawing/2014/main" id="{835BF572-A87F-7B5A-70A6-5745B60E0CFE}"/>
+              </a:ext>
+            </a:extLst>
+          </p:cNvPr>
+          <p:cNvSpPr txBox="1"/>
+          <p:nvPr/>
+        </p:nvSpPr>
+        <p:spPr>
+          <a:xfrm>
+            <a:off x="163201" y="158513"/>
+            <a:ext cx="2832247" cy="461665"/>
+          </a:xfrm>
+          <a:prstGeom prst="rect">
+            <a:avLst/>
+          </a:prstGeom>
+          <a:noFill/>
+        </p:spPr>
+        <p:txBody>
+          <a:bodyPr wrap="square" rtlCol="0">
+            <a:spAutoFit/>
+          </a:bodyPr>
+          <a:lstStyle/>
+          <a:p>
+            <a:r>
+              <a:rPr lang="en-US" altLang="ko-KR" sz="2400" dirty="0">
+                <a:solidFill>
+                  <a:schemeClr val="bg1"/>
+                </a:solidFill>
+              </a:rPr>
+              <a:t>detail.html</a:t>
+            </a:r>
+            <a:endParaRPr lang="ko-KR" altLang="en-US" sz="2400" dirty="0">
+              <a:solidFill>
+                <a:schemeClr val="bg1"/>
+              </a:solidFill>
+            </a:endParaRPr>
+          </a:p>
+        </p:txBody>
+      </p:sp>
+      <p:sp>
+        <p:nvSpPr>
+          <p:cNvPr id="2" name="TextBox 1">
+            <a:extLst>
+              <a:ext uri="{FF2B5EF4-FFF2-40B4-BE49-F238E27FC236}">
+                <a16:creationId xmlns:a16="http://schemas.microsoft.com/office/drawing/2014/main" id="{A326FDC0-720C-9F41-39C5-F9853E93C30B}"/>
+              </a:ext>
+            </a:extLst>
+          </p:cNvPr>
+          <p:cNvSpPr txBox="1"/>
+          <p:nvPr/>
+        </p:nvSpPr>
+        <p:spPr>
+          <a:xfrm>
+            <a:off x="1962951" y="165886"/>
+            <a:ext cx="2064993" cy="454292"/>
+          </a:xfrm>
+          <a:prstGeom prst="rect">
+            <a:avLst/>
+          </a:prstGeom>
+          <a:noFill/>
+        </p:spPr>
+        <p:txBody>
+          <a:bodyPr wrap="square" rtlCol="0">
+            <a:spAutoFit/>
+          </a:bodyPr>
+          <a:lstStyle/>
+          <a:p>
+            <a:pPr>
+              <a:lnSpc>
+                <a:spcPct val="150000"/>
+              </a:lnSpc>
+            </a:pPr>
+            <a:r>
+              <a:rPr lang="ko-KR" altLang="en-US" dirty="0">
+                <a:solidFill>
+                  <a:schemeClr val="bg1"/>
+                </a:solidFill>
+              </a:rPr>
+              <a:t>유효성 검사</a:t>
+            </a:r>
+          </a:p>
+        </p:txBody>
+      </p:sp>
+      <p:sp>
+        <p:nvSpPr>
+          <p:cNvPr id="33" name="직사각형 32">
+            <a:extLst>
+              <a:ext uri="{FF2B5EF4-FFF2-40B4-BE49-F238E27FC236}">
+                <a16:creationId xmlns:a16="http://schemas.microsoft.com/office/drawing/2014/main" id="{59A7C86F-D3AB-435D-C70E-ACFA6ABA573F}"/>
+              </a:ext>
+            </a:extLst>
+          </p:cNvPr>
+          <p:cNvSpPr/>
+          <p:nvPr/>
+        </p:nvSpPr>
+        <p:spPr>
+          <a:xfrm>
+            <a:off x="1579324" y="4207410"/>
+            <a:ext cx="4415076" cy="1445245"/>
+          </a:xfrm>
+          <a:prstGeom prst="rect">
+            <a:avLst/>
+          </a:prstGeom>
+          <a:noFill/>
+          <a:ln>
+            <a:solidFill>
+              <a:srgbClr val="FF0000"/>
+            </a:solidFill>
+          </a:ln>
+        </p:spPr>
+        <p:style>
+          <a:lnRef idx="2">
+            <a:schemeClr val="accent1">
+              <a:shade val="15000"/>
+            </a:schemeClr>
+          </a:lnRef>
+          <a:fillRef idx="1">
+            <a:schemeClr val="accent1"/>
+          </a:fillRef>
+          <a:effectRef idx="0">
+            <a:schemeClr val="accent1"/>
+          </a:effectRef>
+          <a:fontRef idx="minor">
+            <a:schemeClr val="lt1"/>
+          </a:fontRef>
+        </p:style>
+        <p:txBody>
+          <a:bodyPr rtlCol="0" anchor="ctr"/>
+          <a:lstStyle/>
+          <a:p>
+            <a:pPr algn="ctr"/>
+            <a:endParaRPr lang="ko-KR" altLang="en-US"/>
+          </a:p>
+        </p:txBody>
+      </p:sp>
+      <p:sp>
+        <p:nvSpPr>
+          <p:cNvPr id="12" name="TextBox 11">
+            <a:extLst>
+              <a:ext uri="{FF2B5EF4-FFF2-40B4-BE49-F238E27FC236}">
+                <a16:creationId xmlns:a16="http://schemas.microsoft.com/office/drawing/2014/main" id="{FCA3ABF4-13D9-855F-82F3-E44BD9EE1A1E}"/>
+              </a:ext>
+            </a:extLst>
+          </p:cNvPr>
+          <p:cNvSpPr txBox="1"/>
+          <p:nvPr/>
+        </p:nvSpPr>
+        <p:spPr>
+          <a:xfrm>
+            <a:off x="7937090" y="976722"/>
+            <a:ext cx="3866983" cy="697050"/>
+          </a:xfrm>
+          <a:prstGeom prst="rect">
+            <a:avLst/>
+          </a:prstGeom>
+          <a:noFill/>
+        </p:spPr>
+        <p:txBody>
+          <a:bodyPr wrap="square" rtlCol="0">
+            <a:spAutoFit/>
+          </a:bodyPr>
+          <a:lstStyle/>
+          <a:p>
+            <a:pPr>
+              <a:lnSpc>
+                <a:spcPct val="150000"/>
+              </a:lnSpc>
+            </a:pPr>
+            <a:r>
+              <a:rPr lang="ko-KR" altLang="en-US" sz="1400" dirty="0">
+                <a:solidFill>
+                  <a:schemeClr val="bg1"/>
+                </a:solidFill>
+              </a:rPr>
+              <a:t>프론트 시험에서의 유효성 검사와 같은 로직</a:t>
+            </a:r>
+            <a:r>
+              <a:rPr lang="en-US" altLang="ko-KR" sz="1400" dirty="0">
+                <a:solidFill>
+                  <a:schemeClr val="bg1"/>
+                </a:solidFill>
+              </a:rPr>
+              <a:t>.</a:t>
+            </a:r>
+          </a:p>
+          <a:p>
+            <a:pPr>
+              <a:lnSpc>
+                <a:spcPct val="150000"/>
+              </a:lnSpc>
+            </a:pPr>
+            <a:r>
+              <a:rPr lang="ko-KR" altLang="en-US" sz="1400" dirty="0">
+                <a:solidFill>
+                  <a:schemeClr val="bg1"/>
+                </a:solidFill>
+              </a:rPr>
+              <a:t>등록이 완료되면 </a:t>
+            </a:r>
+            <a:r>
+              <a:rPr lang="ko-KR" altLang="en-US" sz="1400" dirty="0" err="1">
+                <a:solidFill>
+                  <a:schemeClr val="bg1"/>
+                </a:solidFill>
+              </a:rPr>
+              <a:t>모달</a:t>
+            </a:r>
+            <a:r>
+              <a:rPr lang="ko-KR" altLang="en-US" sz="1400" dirty="0">
+                <a:solidFill>
+                  <a:schemeClr val="bg1"/>
+                </a:solidFill>
+              </a:rPr>
+              <a:t> 창을 닫는다</a:t>
+            </a:r>
+          </a:p>
+        </p:txBody>
+      </p:sp>
+      <p:sp>
+        <p:nvSpPr>
+          <p:cNvPr id="6" name="TextBox 5">
+            <a:extLst>
+              <a:ext uri="{FF2B5EF4-FFF2-40B4-BE49-F238E27FC236}">
+                <a16:creationId xmlns:a16="http://schemas.microsoft.com/office/drawing/2014/main" id="{E0A6E31C-3CC8-802D-CDEE-22B9A5B3B82A}"/>
+              </a:ext>
+            </a:extLst>
+          </p:cNvPr>
+          <p:cNvSpPr txBox="1"/>
+          <p:nvPr/>
+        </p:nvSpPr>
+        <p:spPr>
+          <a:xfrm>
+            <a:off x="7777018" y="1955346"/>
+            <a:ext cx="4414982" cy="3784882"/>
+          </a:xfrm>
+          <a:prstGeom prst="rect">
+            <a:avLst/>
+          </a:prstGeom>
+          <a:noFill/>
+        </p:spPr>
+        <p:txBody>
+          <a:bodyPr wrap="square">
+            <a:spAutoFit/>
+          </a:bodyPr>
+          <a:lstStyle/>
+          <a:p>
+            <a:pPr>
+              <a:lnSpc>
+                <a:spcPts val="1650"/>
+              </a:lnSpc>
+              <a:buNone/>
+            </a:pPr>
+            <a:r>
+              <a:rPr lang="en-US" altLang="ko-KR" sz="1200" b="0" dirty="0">
+                <a:solidFill>
+                  <a:srgbClr val="C678DD"/>
+                </a:solidFill>
+                <a:effectLst/>
+                <a:latin typeface="D2Coding ligature" panose="020B0609020101020101" pitchFamily="49" charset="-127"/>
+                <a:ea typeface="D2Coding ligature" panose="020B0609020101020101" pitchFamily="49" charset="-127"/>
+              </a:rPr>
+              <a:t>function</a:t>
+            </a:r>
+            <a:r>
+              <a:rPr lang="en-US" altLang="ko-KR" sz="1200" b="0" dirty="0">
+                <a:solidFill>
+                  <a:srgbClr val="ABB2BF"/>
+                </a:solidFill>
+                <a:effectLst/>
+                <a:latin typeface="D2Coding ligature" panose="020B0609020101020101" pitchFamily="49" charset="-127"/>
+                <a:ea typeface="D2Coding ligature" panose="020B0609020101020101" pitchFamily="49" charset="-127"/>
+              </a:rPr>
+              <a:t> </a:t>
+            </a:r>
+            <a:r>
+              <a:rPr lang="en-US" altLang="ko-KR" sz="1200" b="0" dirty="0" err="1">
+                <a:solidFill>
+                  <a:srgbClr val="61AFEF"/>
+                </a:solidFill>
+                <a:effectLst/>
+                <a:latin typeface="D2Coding ligature" panose="020B0609020101020101" pitchFamily="49" charset="-127"/>
+                <a:ea typeface="D2Coding ligature" panose="020B0609020101020101" pitchFamily="49" charset="-127"/>
+              </a:rPr>
+              <a:t>checkValidity</a:t>
+            </a:r>
+            <a:r>
+              <a:rPr lang="en-US" altLang="ko-KR" sz="1200" b="0" dirty="0">
+                <a:solidFill>
+                  <a:srgbClr val="ABB2BF"/>
+                </a:solidFill>
+                <a:effectLst/>
+                <a:latin typeface="D2Coding ligature" panose="020B0609020101020101" pitchFamily="49" charset="-127"/>
+                <a:ea typeface="D2Coding ligature" panose="020B0609020101020101" pitchFamily="49" charset="-127"/>
+              </a:rPr>
+              <a:t>(){</a:t>
+            </a:r>
+          </a:p>
+          <a:p>
+            <a:pPr>
+              <a:lnSpc>
+                <a:spcPts val="1650"/>
+              </a:lnSpc>
+              <a:buNone/>
+            </a:pPr>
+            <a:r>
+              <a:rPr lang="en-US" altLang="ko-KR" sz="1200" b="0" dirty="0">
+                <a:solidFill>
+                  <a:srgbClr val="ABB2BF"/>
+                </a:solidFill>
+                <a:effectLst/>
+                <a:latin typeface="D2Coding ligature" panose="020B0609020101020101" pitchFamily="49" charset="-127"/>
+                <a:ea typeface="D2Coding ligature" panose="020B0609020101020101" pitchFamily="49" charset="-127"/>
+              </a:rPr>
+              <a:t>  </a:t>
+            </a:r>
+            <a:r>
+              <a:rPr lang="en-US" altLang="ko-KR" sz="1200" b="0" dirty="0">
+                <a:solidFill>
+                  <a:srgbClr val="C678DD"/>
+                </a:solidFill>
+                <a:effectLst/>
+                <a:latin typeface="D2Coding ligature" panose="020B0609020101020101" pitchFamily="49" charset="-127"/>
+                <a:ea typeface="D2Coding ligature" panose="020B0609020101020101" pitchFamily="49" charset="-127"/>
+              </a:rPr>
+              <a:t>const</a:t>
+            </a:r>
+            <a:r>
+              <a:rPr lang="en-US" altLang="ko-KR" sz="1200" b="0" dirty="0">
+                <a:solidFill>
+                  <a:srgbClr val="ABB2BF"/>
+                </a:solidFill>
+                <a:effectLst/>
+                <a:latin typeface="D2Coding ligature" panose="020B0609020101020101" pitchFamily="49" charset="-127"/>
+                <a:ea typeface="D2Coding ligature" panose="020B0609020101020101" pitchFamily="49" charset="-127"/>
+              </a:rPr>
+              <a:t> </a:t>
+            </a:r>
+            <a:r>
+              <a:rPr lang="en-US" altLang="ko-KR" sz="1200" b="0" dirty="0">
+                <a:solidFill>
+                  <a:srgbClr val="E5C07B"/>
+                </a:solidFill>
+                <a:effectLst/>
+                <a:latin typeface="D2Coding ligature" panose="020B0609020101020101" pitchFamily="49" charset="-127"/>
+                <a:ea typeface="D2Coding ligature" panose="020B0609020101020101" pitchFamily="49" charset="-127"/>
+              </a:rPr>
+              <a:t>content</a:t>
+            </a:r>
+            <a:r>
+              <a:rPr lang="en-US" altLang="ko-KR" sz="1200" b="0" dirty="0">
+                <a:solidFill>
+                  <a:srgbClr val="ABB2BF"/>
+                </a:solidFill>
+                <a:effectLst/>
+                <a:latin typeface="D2Coding ligature" panose="020B0609020101020101" pitchFamily="49" charset="-127"/>
+                <a:ea typeface="D2Coding ligature" panose="020B0609020101020101" pitchFamily="49" charset="-127"/>
+              </a:rPr>
+              <a:t> </a:t>
+            </a:r>
+            <a:r>
+              <a:rPr lang="en-US" altLang="ko-KR" sz="1200" b="0" dirty="0">
+                <a:solidFill>
+                  <a:srgbClr val="56B6C2"/>
+                </a:solidFill>
+                <a:effectLst/>
+                <a:latin typeface="D2Coding ligature" panose="020B0609020101020101" pitchFamily="49" charset="-127"/>
+                <a:ea typeface="D2Coding ligature" panose="020B0609020101020101" pitchFamily="49" charset="-127"/>
+              </a:rPr>
+              <a:t>=</a:t>
+            </a:r>
+            <a:r>
+              <a:rPr lang="en-US" altLang="ko-KR" sz="1200" b="0" dirty="0">
+                <a:solidFill>
+                  <a:srgbClr val="ABB2BF"/>
+                </a:solidFill>
+                <a:effectLst/>
+                <a:latin typeface="D2Coding ligature" panose="020B0609020101020101" pitchFamily="49" charset="-127"/>
+                <a:ea typeface="D2Coding ligature" panose="020B0609020101020101" pitchFamily="49" charset="-127"/>
+              </a:rPr>
+              <a:t> </a:t>
+            </a:r>
+            <a:r>
+              <a:rPr lang="en-US" altLang="ko-KR" sz="1200" b="0" dirty="0" err="1">
+                <a:solidFill>
+                  <a:srgbClr val="E5C07B"/>
+                </a:solidFill>
+                <a:effectLst/>
+                <a:latin typeface="D2Coding ligature" panose="020B0609020101020101" pitchFamily="49" charset="-127"/>
+                <a:ea typeface="D2Coding ligature" panose="020B0609020101020101" pitchFamily="49" charset="-127"/>
+              </a:rPr>
+              <a:t>document</a:t>
+            </a:r>
+            <a:r>
+              <a:rPr lang="en-US" altLang="ko-KR" sz="1200" b="0" dirty="0" err="1">
+                <a:solidFill>
+                  <a:srgbClr val="ABB2BF"/>
+                </a:solidFill>
+                <a:effectLst/>
+                <a:latin typeface="D2Coding ligature" panose="020B0609020101020101" pitchFamily="49" charset="-127"/>
+                <a:ea typeface="D2Coding ligature" panose="020B0609020101020101" pitchFamily="49" charset="-127"/>
+              </a:rPr>
+              <a:t>.</a:t>
+            </a:r>
+            <a:r>
+              <a:rPr lang="en-US" altLang="ko-KR" sz="1200" b="0" dirty="0" err="1">
+                <a:solidFill>
+                  <a:srgbClr val="61AFEF"/>
+                </a:solidFill>
+                <a:effectLst/>
+                <a:latin typeface="D2Coding ligature" panose="020B0609020101020101" pitchFamily="49" charset="-127"/>
+                <a:ea typeface="D2Coding ligature" panose="020B0609020101020101" pitchFamily="49" charset="-127"/>
+              </a:rPr>
+              <a:t>getElementById</a:t>
+            </a:r>
+            <a:r>
+              <a:rPr lang="en-US" altLang="ko-KR" sz="1200" b="0" dirty="0">
+                <a:solidFill>
+                  <a:srgbClr val="ABB2BF"/>
+                </a:solidFill>
+                <a:effectLst/>
+                <a:latin typeface="D2Coding ligature" panose="020B0609020101020101" pitchFamily="49" charset="-127"/>
+                <a:ea typeface="D2Coding ligature" panose="020B0609020101020101" pitchFamily="49" charset="-127"/>
+              </a:rPr>
+              <a:t>(</a:t>
+            </a:r>
+            <a:r>
+              <a:rPr lang="en-US" altLang="ko-KR" sz="1200" b="0" dirty="0">
+                <a:solidFill>
+                  <a:srgbClr val="98C379"/>
+                </a:solidFill>
+                <a:effectLst/>
+                <a:latin typeface="D2Coding ligature" panose="020B0609020101020101" pitchFamily="49" charset="-127"/>
+                <a:ea typeface="D2Coding ligature" panose="020B0609020101020101" pitchFamily="49" charset="-127"/>
+              </a:rPr>
+              <a:t>"review-	content"</a:t>
+            </a:r>
+            <a:r>
+              <a:rPr lang="en-US" altLang="ko-KR" sz="1200" b="0" dirty="0">
+                <a:solidFill>
+                  <a:srgbClr val="ABB2BF"/>
+                </a:solidFill>
+                <a:effectLst/>
+                <a:latin typeface="D2Coding ligature" panose="020B0609020101020101" pitchFamily="49" charset="-127"/>
+                <a:ea typeface="D2Coding ligature" panose="020B0609020101020101" pitchFamily="49" charset="-127"/>
+              </a:rPr>
+              <a:t>);</a:t>
+            </a:r>
+          </a:p>
+          <a:p>
+            <a:pPr>
+              <a:lnSpc>
+                <a:spcPts val="1650"/>
+              </a:lnSpc>
+              <a:buNone/>
+            </a:pPr>
+            <a:r>
+              <a:rPr lang="en-US" altLang="ko-KR" sz="1200" b="0" dirty="0">
+                <a:solidFill>
+                  <a:srgbClr val="ABB2BF"/>
+                </a:solidFill>
+                <a:effectLst/>
+                <a:latin typeface="D2Coding ligature" panose="020B0609020101020101" pitchFamily="49" charset="-127"/>
+                <a:ea typeface="D2Coding ligature" panose="020B0609020101020101" pitchFamily="49" charset="-127"/>
+              </a:rPr>
+              <a:t>  </a:t>
+            </a:r>
+            <a:r>
+              <a:rPr lang="en-US" altLang="ko-KR" sz="1200" b="0" dirty="0">
+                <a:solidFill>
+                  <a:srgbClr val="C678DD"/>
+                </a:solidFill>
+                <a:effectLst/>
+                <a:latin typeface="D2Coding ligature" panose="020B0609020101020101" pitchFamily="49" charset="-127"/>
+                <a:ea typeface="D2Coding ligature" panose="020B0609020101020101" pitchFamily="49" charset="-127"/>
+              </a:rPr>
+              <a:t>const</a:t>
+            </a:r>
+            <a:r>
+              <a:rPr lang="en-US" altLang="ko-KR" sz="1200" b="0" dirty="0">
+                <a:solidFill>
+                  <a:srgbClr val="ABB2BF"/>
+                </a:solidFill>
+                <a:effectLst/>
+                <a:latin typeface="D2Coding ligature" panose="020B0609020101020101" pitchFamily="49" charset="-127"/>
+                <a:ea typeface="D2Coding ligature" panose="020B0609020101020101" pitchFamily="49" charset="-127"/>
+              </a:rPr>
+              <a:t> </a:t>
+            </a:r>
+            <a:r>
+              <a:rPr lang="en-US" altLang="ko-KR" sz="1200" b="0" dirty="0">
+                <a:solidFill>
+                  <a:srgbClr val="E5C07B"/>
+                </a:solidFill>
+                <a:effectLst/>
+                <a:latin typeface="D2Coding ligature" panose="020B0609020101020101" pitchFamily="49" charset="-127"/>
+                <a:ea typeface="D2Coding ligature" panose="020B0609020101020101" pitchFamily="49" charset="-127"/>
+              </a:rPr>
+              <a:t>title</a:t>
+            </a:r>
+            <a:r>
+              <a:rPr lang="en-US" altLang="ko-KR" sz="1200" b="0" dirty="0">
+                <a:solidFill>
+                  <a:srgbClr val="ABB2BF"/>
+                </a:solidFill>
+                <a:effectLst/>
+                <a:latin typeface="D2Coding ligature" panose="020B0609020101020101" pitchFamily="49" charset="-127"/>
+                <a:ea typeface="D2Coding ligature" panose="020B0609020101020101" pitchFamily="49" charset="-127"/>
+              </a:rPr>
+              <a:t> </a:t>
+            </a:r>
+            <a:r>
+              <a:rPr lang="en-US" altLang="ko-KR" sz="1200" b="0" dirty="0">
+                <a:solidFill>
+                  <a:srgbClr val="56B6C2"/>
+                </a:solidFill>
+                <a:effectLst/>
+                <a:latin typeface="D2Coding ligature" panose="020B0609020101020101" pitchFamily="49" charset="-127"/>
+                <a:ea typeface="D2Coding ligature" panose="020B0609020101020101" pitchFamily="49" charset="-127"/>
+              </a:rPr>
+              <a:t>=</a:t>
+            </a:r>
+            <a:r>
+              <a:rPr lang="en-US" altLang="ko-KR" sz="1200" b="0" dirty="0">
+                <a:solidFill>
+                  <a:srgbClr val="ABB2BF"/>
+                </a:solidFill>
+                <a:effectLst/>
+                <a:latin typeface="D2Coding ligature" panose="020B0609020101020101" pitchFamily="49" charset="-127"/>
+                <a:ea typeface="D2Coding ligature" panose="020B0609020101020101" pitchFamily="49" charset="-127"/>
+              </a:rPr>
+              <a:t> </a:t>
+            </a:r>
+            <a:r>
+              <a:rPr lang="en-US" altLang="ko-KR" sz="1200" b="0" dirty="0" err="1">
+                <a:solidFill>
+                  <a:srgbClr val="E5C07B"/>
+                </a:solidFill>
+                <a:effectLst/>
+                <a:latin typeface="D2Coding ligature" panose="020B0609020101020101" pitchFamily="49" charset="-127"/>
+                <a:ea typeface="D2Coding ligature" panose="020B0609020101020101" pitchFamily="49" charset="-127"/>
+              </a:rPr>
+              <a:t>document</a:t>
+            </a:r>
+            <a:r>
+              <a:rPr lang="en-US" altLang="ko-KR" sz="1200" b="0" dirty="0" err="1">
+                <a:solidFill>
+                  <a:srgbClr val="ABB2BF"/>
+                </a:solidFill>
+                <a:effectLst/>
+                <a:latin typeface="D2Coding ligature" panose="020B0609020101020101" pitchFamily="49" charset="-127"/>
+                <a:ea typeface="D2Coding ligature" panose="020B0609020101020101" pitchFamily="49" charset="-127"/>
+              </a:rPr>
+              <a:t>.</a:t>
+            </a:r>
+            <a:r>
+              <a:rPr lang="en-US" altLang="ko-KR" sz="1200" b="0" dirty="0" err="1">
+                <a:solidFill>
+                  <a:srgbClr val="61AFEF"/>
+                </a:solidFill>
+                <a:effectLst/>
+                <a:latin typeface="D2Coding ligature" panose="020B0609020101020101" pitchFamily="49" charset="-127"/>
+                <a:ea typeface="D2Coding ligature" panose="020B0609020101020101" pitchFamily="49" charset="-127"/>
+              </a:rPr>
+              <a:t>getElementById</a:t>
+            </a:r>
+            <a:r>
+              <a:rPr lang="en-US" altLang="ko-KR" sz="1200" b="0" dirty="0">
+                <a:solidFill>
+                  <a:srgbClr val="ABB2BF"/>
+                </a:solidFill>
+                <a:effectLst/>
+                <a:latin typeface="D2Coding ligature" panose="020B0609020101020101" pitchFamily="49" charset="-127"/>
+                <a:ea typeface="D2Coding ligature" panose="020B0609020101020101" pitchFamily="49" charset="-127"/>
+              </a:rPr>
+              <a:t>(</a:t>
+            </a:r>
+            <a:r>
+              <a:rPr lang="en-US" altLang="ko-KR" sz="1200" b="0" dirty="0">
+                <a:solidFill>
+                  <a:srgbClr val="98C379"/>
+                </a:solidFill>
+                <a:effectLst/>
+                <a:latin typeface="D2Coding ligature" panose="020B0609020101020101" pitchFamily="49" charset="-127"/>
+                <a:ea typeface="D2Coding ligature" panose="020B0609020101020101" pitchFamily="49" charset="-127"/>
+              </a:rPr>
+              <a:t>"review-title"</a:t>
+            </a:r>
+            <a:r>
+              <a:rPr lang="en-US" altLang="ko-KR" sz="1200" b="0" dirty="0">
+                <a:solidFill>
+                  <a:srgbClr val="ABB2BF"/>
+                </a:solidFill>
+                <a:effectLst/>
+                <a:latin typeface="D2Coding ligature" panose="020B0609020101020101" pitchFamily="49" charset="-127"/>
+                <a:ea typeface="D2Coding ligature" panose="020B0609020101020101" pitchFamily="49" charset="-127"/>
+              </a:rPr>
+              <a:t>);</a:t>
+            </a:r>
+          </a:p>
+          <a:p>
+            <a:pPr>
+              <a:lnSpc>
+                <a:spcPts val="1650"/>
+              </a:lnSpc>
+              <a:buNone/>
+            </a:pPr>
+            <a:br>
+              <a:rPr lang="en-US" altLang="ko-KR" sz="1200" b="0" dirty="0">
+                <a:solidFill>
+                  <a:srgbClr val="ABB2BF"/>
+                </a:solidFill>
+                <a:effectLst/>
+                <a:latin typeface="D2Coding ligature" panose="020B0609020101020101" pitchFamily="49" charset="-127"/>
+                <a:ea typeface="D2Coding ligature" panose="020B0609020101020101" pitchFamily="49" charset="-127"/>
+              </a:rPr>
+            </a:br>
+            <a:br>
+              <a:rPr lang="en-US" altLang="ko-KR" sz="1200" b="0" dirty="0">
+                <a:solidFill>
+                  <a:srgbClr val="ABB2BF"/>
+                </a:solidFill>
+                <a:effectLst/>
+                <a:latin typeface="D2Coding ligature" panose="020B0609020101020101" pitchFamily="49" charset="-127"/>
+                <a:ea typeface="D2Coding ligature" panose="020B0609020101020101" pitchFamily="49" charset="-127"/>
+              </a:rPr>
+            </a:br>
+            <a:endParaRPr lang="en-US" altLang="ko-KR" sz="1200" b="0" dirty="0">
+              <a:solidFill>
+                <a:srgbClr val="ABB2BF"/>
+              </a:solidFill>
+              <a:effectLst/>
+              <a:latin typeface="D2Coding ligature" panose="020B0609020101020101" pitchFamily="49" charset="-127"/>
+              <a:ea typeface="D2Coding ligature" panose="020B0609020101020101" pitchFamily="49" charset="-127"/>
+            </a:endParaRPr>
+          </a:p>
+          <a:p>
+            <a:pPr>
+              <a:lnSpc>
+                <a:spcPts val="1650"/>
+              </a:lnSpc>
+              <a:buNone/>
+            </a:pPr>
+            <a:r>
+              <a:rPr lang="en-US" altLang="ko-KR" sz="1200" b="0" dirty="0">
+                <a:solidFill>
+                  <a:srgbClr val="ABB2BF"/>
+                </a:solidFill>
+                <a:effectLst/>
+                <a:latin typeface="D2Coding ligature" panose="020B0609020101020101" pitchFamily="49" charset="-127"/>
+                <a:ea typeface="D2Coding ligature" panose="020B0609020101020101" pitchFamily="49" charset="-127"/>
+              </a:rPr>
+              <a:t>  </a:t>
+            </a:r>
+            <a:r>
+              <a:rPr lang="en-US" altLang="ko-KR" sz="1200" b="0" dirty="0">
+                <a:solidFill>
+                  <a:srgbClr val="C678DD"/>
+                </a:solidFill>
+                <a:effectLst/>
+                <a:latin typeface="D2Coding ligature" panose="020B0609020101020101" pitchFamily="49" charset="-127"/>
+                <a:ea typeface="D2Coding ligature" panose="020B0609020101020101" pitchFamily="49" charset="-127"/>
+              </a:rPr>
+              <a:t>if</a:t>
+            </a:r>
+            <a:r>
+              <a:rPr lang="en-US" altLang="ko-KR" sz="1200" b="0" dirty="0">
+                <a:solidFill>
+                  <a:srgbClr val="ABB2BF"/>
+                </a:solidFill>
+                <a:effectLst/>
+                <a:latin typeface="D2Coding ligature" panose="020B0609020101020101" pitchFamily="49" charset="-127"/>
+                <a:ea typeface="D2Coding ligature" panose="020B0609020101020101" pitchFamily="49" charset="-127"/>
+              </a:rPr>
+              <a:t>(</a:t>
+            </a:r>
+            <a:r>
+              <a:rPr lang="en-US" altLang="ko-KR" sz="1200" b="0" dirty="0" err="1">
+                <a:solidFill>
+                  <a:srgbClr val="E5C07B"/>
+                </a:solidFill>
+                <a:effectLst/>
+                <a:latin typeface="D2Coding ligature" panose="020B0609020101020101" pitchFamily="49" charset="-127"/>
+                <a:ea typeface="D2Coding ligature" panose="020B0609020101020101" pitchFamily="49" charset="-127"/>
+              </a:rPr>
+              <a:t>content</a:t>
+            </a:r>
+            <a:r>
+              <a:rPr lang="en-US" altLang="ko-KR" sz="1200" b="0" dirty="0" err="1">
+                <a:solidFill>
+                  <a:srgbClr val="ABB2BF"/>
+                </a:solidFill>
+                <a:effectLst/>
+                <a:latin typeface="D2Coding ligature" panose="020B0609020101020101" pitchFamily="49" charset="-127"/>
+                <a:ea typeface="D2Coding ligature" panose="020B0609020101020101" pitchFamily="49" charset="-127"/>
+              </a:rPr>
+              <a:t>.</a:t>
+            </a:r>
+            <a:r>
+              <a:rPr lang="en-US" altLang="ko-KR" sz="1200" b="0" dirty="0" err="1">
+                <a:solidFill>
+                  <a:srgbClr val="E06C75"/>
+                </a:solidFill>
+                <a:effectLst/>
+                <a:latin typeface="D2Coding ligature" panose="020B0609020101020101" pitchFamily="49" charset="-127"/>
+                <a:ea typeface="D2Coding ligature" panose="020B0609020101020101" pitchFamily="49" charset="-127"/>
+              </a:rPr>
+              <a:t>value</a:t>
+            </a:r>
+            <a:r>
+              <a:rPr lang="en-US" altLang="ko-KR" sz="1200" b="0" dirty="0">
+                <a:solidFill>
+                  <a:srgbClr val="ABB2BF"/>
+                </a:solidFill>
+                <a:effectLst/>
+                <a:latin typeface="D2Coding ligature" panose="020B0609020101020101" pitchFamily="49" charset="-127"/>
+                <a:ea typeface="D2Coding ligature" panose="020B0609020101020101" pitchFamily="49" charset="-127"/>
+              </a:rPr>
+              <a:t> </a:t>
+            </a:r>
+            <a:r>
+              <a:rPr lang="en-US" altLang="ko-KR" sz="1200" b="0" dirty="0">
+                <a:solidFill>
+                  <a:srgbClr val="56B6C2"/>
+                </a:solidFill>
+                <a:effectLst/>
+                <a:latin typeface="D2Coding ligature" panose="020B0609020101020101" pitchFamily="49" charset="-127"/>
+                <a:ea typeface="D2Coding ligature" panose="020B0609020101020101" pitchFamily="49" charset="-127"/>
+              </a:rPr>
+              <a:t>==</a:t>
+            </a:r>
+            <a:r>
+              <a:rPr lang="en-US" altLang="ko-KR" sz="1200" b="0" dirty="0">
+                <a:solidFill>
+                  <a:srgbClr val="98C379"/>
+                </a:solidFill>
+                <a:effectLst/>
+                <a:latin typeface="D2Coding ligature" panose="020B0609020101020101" pitchFamily="49" charset="-127"/>
+                <a:ea typeface="D2Coding ligature" panose="020B0609020101020101" pitchFamily="49" charset="-127"/>
+              </a:rPr>
+              <a:t>""</a:t>
+            </a:r>
+            <a:r>
+              <a:rPr lang="en-US" altLang="ko-KR" sz="1200" b="0" dirty="0">
+                <a:solidFill>
+                  <a:srgbClr val="ABB2BF"/>
+                </a:solidFill>
+                <a:effectLst/>
+                <a:latin typeface="D2Coding ligature" panose="020B0609020101020101" pitchFamily="49" charset="-127"/>
+                <a:ea typeface="D2Coding ligature" panose="020B0609020101020101" pitchFamily="49" charset="-127"/>
+              </a:rPr>
+              <a:t>){</a:t>
+            </a:r>
+          </a:p>
+          <a:p>
+            <a:pPr>
+              <a:lnSpc>
+                <a:spcPts val="1650"/>
+              </a:lnSpc>
+              <a:buNone/>
+            </a:pPr>
+            <a:r>
+              <a:rPr lang="en-US" altLang="ko-KR" sz="1200" b="0" dirty="0">
+                <a:solidFill>
+                  <a:srgbClr val="ABB2BF"/>
+                </a:solidFill>
+                <a:effectLst/>
+                <a:latin typeface="D2Coding ligature" panose="020B0609020101020101" pitchFamily="49" charset="-127"/>
+                <a:ea typeface="D2Coding ligature" panose="020B0609020101020101" pitchFamily="49" charset="-127"/>
+              </a:rPr>
+              <a:t>    </a:t>
+            </a:r>
+            <a:r>
+              <a:rPr lang="en-US" altLang="ko-KR" sz="1200" b="0" dirty="0">
+                <a:solidFill>
+                  <a:srgbClr val="56B6C2"/>
+                </a:solidFill>
+                <a:effectLst/>
+                <a:latin typeface="D2Coding ligature" panose="020B0609020101020101" pitchFamily="49" charset="-127"/>
+                <a:ea typeface="D2Coding ligature" panose="020B0609020101020101" pitchFamily="49" charset="-127"/>
+              </a:rPr>
+              <a:t>alert</a:t>
+            </a:r>
+            <a:r>
+              <a:rPr lang="en-US" altLang="ko-KR" sz="1200" b="0" dirty="0">
+                <a:solidFill>
+                  <a:srgbClr val="ABB2BF"/>
+                </a:solidFill>
+                <a:effectLst/>
+                <a:latin typeface="D2Coding ligature" panose="020B0609020101020101" pitchFamily="49" charset="-127"/>
+                <a:ea typeface="D2Coding ligature" panose="020B0609020101020101" pitchFamily="49" charset="-127"/>
+              </a:rPr>
+              <a:t>(</a:t>
+            </a:r>
+            <a:r>
+              <a:rPr lang="en-US" altLang="ko-KR" sz="1200" b="0" dirty="0">
+                <a:solidFill>
+                  <a:srgbClr val="98C379"/>
+                </a:solidFill>
+                <a:effectLst/>
+                <a:latin typeface="D2Coding ligature" panose="020B0609020101020101" pitchFamily="49" charset="-127"/>
+                <a:ea typeface="D2Coding ligature" panose="020B0609020101020101" pitchFamily="49" charset="-127"/>
+              </a:rPr>
+              <a:t>"</a:t>
+            </a:r>
+            <a:r>
+              <a:rPr lang="ko-KR" altLang="en-US" sz="1200" b="0" dirty="0">
+                <a:solidFill>
+                  <a:srgbClr val="98C379"/>
+                </a:solidFill>
+                <a:effectLst/>
+                <a:latin typeface="D2Coding ligature" panose="020B0609020101020101" pitchFamily="49" charset="-127"/>
+                <a:ea typeface="D2Coding ligature" panose="020B0609020101020101" pitchFamily="49" charset="-127"/>
+              </a:rPr>
+              <a:t>내용을 입력하세요</a:t>
+            </a:r>
+            <a:r>
+              <a:rPr lang="en-US" altLang="ko-KR" sz="1200" b="0" dirty="0">
+                <a:solidFill>
+                  <a:srgbClr val="98C379"/>
+                </a:solidFill>
+                <a:effectLst/>
+                <a:latin typeface="D2Coding ligature" panose="020B0609020101020101" pitchFamily="49" charset="-127"/>
+                <a:ea typeface="D2Coding ligature" panose="020B0609020101020101" pitchFamily="49" charset="-127"/>
+              </a:rPr>
+              <a:t>."</a:t>
+            </a:r>
+            <a:r>
+              <a:rPr lang="en-US" altLang="ko-KR" sz="1200" b="0" dirty="0">
+                <a:solidFill>
+                  <a:srgbClr val="ABB2BF"/>
+                </a:solidFill>
+                <a:effectLst/>
+                <a:latin typeface="D2Coding ligature" panose="020B0609020101020101" pitchFamily="49" charset="-127"/>
+                <a:ea typeface="D2Coding ligature" panose="020B0609020101020101" pitchFamily="49" charset="-127"/>
+              </a:rPr>
+              <a:t>);</a:t>
+            </a:r>
+          </a:p>
+          <a:p>
+            <a:pPr>
+              <a:lnSpc>
+                <a:spcPts val="1650"/>
+              </a:lnSpc>
+              <a:buNone/>
+            </a:pPr>
+            <a:r>
+              <a:rPr lang="en-US" altLang="ko-KR" sz="1200" b="0" dirty="0">
+                <a:solidFill>
+                  <a:srgbClr val="ABB2BF"/>
+                </a:solidFill>
+                <a:effectLst/>
+                <a:latin typeface="D2Coding ligature" panose="020B0609020101020101" pitchFamily="49" charset="-127"/>
+                <a:ea typeface="D2Coding ligature" panose="020B0609020101020101" pitchFamily="49" charset="-127"/>
+              </a:rPr>
+              <a:t>  } </a:t>
+            </a:r>
+            <a:r>
+              <a:rPr lang="en-US" altLang="ko-KR" sz="1200" b="0" dirty="0">
+                <a:solidFill>
+                  <a:srgbClr val="C678DD"/>
+                </a:solidFill>
+                <a:effectLst/>
+                <a:latin typeface="D2Coding ligature" panose="020B0609020101020101" pitchFamily="49" charset="-127"/>
+                <a:ea typeface="D2Coding ligature" panose="020B0609020101020101" pitchFamily="49" charset="-127"/>
+              </a:rPr>
+              <a:t>else</a:t>
+            </a:r>
+            <a:r>
+              <a:rPr lang="en-US" altLang="ko-KR" sz="1200" b="0" dirty="0">
+                <a:solidFill>
+                  <a:srgbClr val="ABB2BF"/>
+                </a:solidFill>
+                <a:effectLst/>
+                <a:latin typeface="D2Coding ligature" panose="020B0609020101020101" pitchFamily="49" charset="-127"/>
+                <a:ea typeface="D2Coding ligature" panose="020B0609020101020101" pitchFamily="49" charset="-127"/>
+              </a:rPr>
+              <a:t> </a:t>
+            </a:r>
+            <a:r>
+              <a:rPr lang="en-US" altLang="ko-KR" sz="1200" b="0" dirty="0">
+                <a:solidFill>
+                  <a:srgbClr val="C678DD"/>
+                </a:solidFill>
+                <a:effectLst/>
+                <a:latin typeface="D2Coding ligature" panose="020B0609020101020101" pitchFamily="49" charset="-127"/>
+                <a:ea typeface="D2Coding ligature" panose="020B0609020101020101" pitchFamily="49" charset="-127"/>
+              </a:rPr>
+              <a:t>if</a:t>
+            </a:r>
+            <a:r>
+              <a:rPr lang="en-US" altLang="ko-KR" sz="1200" b="0" dirty="0">
+                <a:solidFill>
+                  <a:srgbClr val="ABB2BF"/>
+                </a:solidFill>
+                <a:effectLst/>
+                <a:latin typeface="D2Coding ligature" panose="020B0609020101020101" pitchFamily="49" charset="-127"/>
+                <a:ea typeface="D2Coding ligature" panose="020B0609020101020101" pitchFamily="49" charset="-127"/>
+              </a:rPr>
+              <a:t>(</a:t>
+            </a:r>
+            <a:r>
+              <a:rPr lang="en-US" altLang="ko-KR" sz="1200" b="0" dirty="0" err="1">
+                <a:solidFill>
+                  <a:srgbClr val="E5C07B"/>
+                </a:solidFill>
+                <a:effectLst/>
+                <a:latin typeface="D2Coding ligature" panose="020B0609020101020101" pitchFamily="49" charset="-127"/>
+                <a:ea typeface="D2Coding ligature" panose="020B0609020101020101" pitchFamily="49" charset="-127"/>
+              </a:rPr>
+              <a:t>title</a:t>
+            </a:r>
+            <a:r>
+              <a:rPr lang="en-US" altLang="ko-KR" sz="1200" b="0" dirty="0" err="1">
+                <a:solidFill>
+                  <a:srgbClr val="ABB2BF"/>
+                </a:solidFill>
+                <a:effectLst/>
+                <a:latin typeface="D2Coding ligature" panose="020B0609020101020101" pitchFamily="49" charset="-127"/>
+                <a:ea typeface="D2Coding ligature" panose="020B0609020101020101" pitchFamily="49" charset="-127"/>
+              </a:rPr>
+              <a:t>.</a:t>
+            </a:r>
+            <a:r>
+              <a:rPr lang="en-US" altLang="ko-KR" sz="1200" b="0" dirty="0" err="1">
+                <a:solidFill>
+                  <a:srgbClr val="E06C75"/>
+                </a:solidFill>
+                <a:effectLst/>
+                <a:latin typeface="D2Coding ligature" panose="020B0609020101020101" pitchFamily="49" charset="-127"/>
+                <a:ea typeface="D2Coding ligature" panose="020B0609020101020101" pitchFamily="49" charset="-127"/>
+              </a:rPr>
+              <a:t>value</a:t>
+            </a:r>
+            <a:r>
+              <a:rPr lang="en-US" altLang="ko-KR" sz="1200" b="0" dirty="0">
+                <a:solidFill>
+                  <a:srgbClr val="ABB2BF"/>
+                </a:solidFill>
+                <a:effectLst/>
+                <a:latin typeface="D2Coding ligature" panose="020B0609020101020101" pitchFamily="49" charset="-127"/>
+                <a:ea typeface="D2Coding ligature" panose="020B0609020101020101" pitchFamily="49" charset="-127"/>
+              </a:rPr>
+              <a:t> </a:t>
+            </a:r>
+            <a:r>
+              <a:rPr lang="en-US" altLang="ko-KR" sz="1200" b="0" dirty="0">
+                <a:solidFill>
+                  <a:srgbClr val="56B6C2"/>
+                </a:solidFill>
+                <a:effectLst/>
+                <a:latin typeface="D2Coding ligature" panose="020B0609020101020101" pitchFamily="49" charset="-127"/>
+                <a:ea typeface="D2Coding ligature" panose="020B0609020101020101" pitchFamily="49" charset="-127"/>
+              </a:rPr>
+              <a:t>==</a:t>
+            </a:r>
+            <a:r>
+              <a:rPr lang="en-US" altLang="ko-KR" sz="1200" b="0" dirty="0">
+                <a:solidFill>
+                  <a:srgbClr val="ABB2BF"/>
+                </a:solidFill>
+                <a:effectLst/>
+                <a:latin typeface="D2Coding ligature" panose="020B0609020101020101" pitchFamily="49" charset="-127"/>
+                <a:ea typeface="D2Coding ligature" panose="020B0609020101020101" pitchFamily="49" charset="-127"/>
+              </a:rPr>
+              <a:t> </a:t>
+            </a:r>
+            <a:r>
+              <a:rPr lang="en-US" altLang="ko-KR" sz="1200" b="0" dirty="0">
+                <a:solidFill>
+                  <a:srgbClr val="98C379"/>
+                </a:solidFill>
+                <a:effectLst/>
+                <a:latin typeface="D2Coding ligature" panose="020B0609020101020101" pitchFamily="49" charset="-127"/>
+                <a:ea typeface="D2Coding ligature" panose="020B0609020101020101" pitchFamily="49" charset="-127"/>
+              </a:rPr>
+              <a:t>""</a:t>
+            </a:r>
+            <a:r>
+              <a:rPr lang="en-US" altLang="ko-KR" sz="1200" b="0" dirty="0">
+                <a:solidFill>
+                  <a:srgbClr val="ABB2BF"/>
+                </a:solidFill>
+                <a:effectLst/>
+                <a:latin typeface="D2Coding ligature" panose="020B0609020101020101" pitchFamily="49" charset="-127"/>
+                <a:ea typeface="D2Coding ligature" panose="020B0609020101020101" pitchFamily="49" charset="-127"/>
+              </a:rPr>
+              <a:t>){</a:t>
+            </a:r>
+          </a:p>
+          <a:p>
+            <a:pPr>
+              <a:lnSpc>
+                <a:spcPts val="1650"/>
+              </a:lnSpc>
+              <a:buNone/>
+            </a:pPr>
+            <a:r>
+              <a:rPr lang="en-US" altLang="ko-KR" sz="1200" b="0" dirty="0">
+                <a:solidFill>
+                  <a:srgbClr val="ABB2BF"/>
+                </a:solidFill>
+                <a:effectLst/>
+                <a:latin typeface="D2Coding ligature" panose="020B0609020101020101" pitchFamily="49" charset="-127"/>
+                <a:ea typeface="D2Coding ligature" panose="020B0609020101020101" pitchFamily="49" charset="-127"/>
+              </a:rPr>
+              <a:t>    </a:t>
+            </a:r>
+            <a:r>
+              <a:rPr lang="en-US" altLang="ko-KR" sz="1200" b="0" dirty="0">
+                <a:solidFill>
+                  <a:srgbClr val="56B6C2"/>
+                </a:solidFill>
+                <a:effectLst/>
+                <a:latin typeface="D2Coding ligature" panose="020B0609020101020101" pitchFamily="49" charset="-127"/>
+                <a:ea typeface="D2Coding ligature" panose="020B0609020101020101" pitchFamily="49" charset="-127"/>
+              </a:rPr>
+              <a:t>alert</a:t>
+            </a:r>
+            <a:r>
+              <a:rPr lang="en-US" altLang="ko-KR" sz="1200" b="0" dirty="0">
+                <a:solidFill>
+                  <a:srgbClr val="ABB2BF"/>
+                </a:solidFill>
+                <a:effectLst/>
+                <a:latin typeface="D2Coding ligature" panose="020B0609020101020101" pitchFamily="49" charset="-127"/>
+                <a:ea typeface="D2Coding ligature" panose="020B0609020101020101" pitchFamily="49" charset="-127"/>
+              </a:rPr>
+              <a:t>(</a:t>
+            </a:r>
+            <a:r>
+              <a:rPr lang="en-US" altLang="ko-KR" sz="1200" b="0" dirty="0">
+                <a:solidFill>
+                  <a:srgbClr val="98C379"/>
+                </a:solidFill>
+                <a:effectLst/>
+                <a:latin typeface="D2Coding ligature" panose="020B0609020101020101" pitchFamily="49" charset="-127"/>
+                <a:ea typeface="D2Coding ligature" panose="020B0609020101020101" pitchFamily="49" charset="-127"/>
+              </a:rPr>
+              <a:t>"</a:t>
+            </a:r>
+            <a:r>
+              <a:rPr lang="ko-KR" altLang="en-US" sz="1200" b="0" dirty="0">
+                <a:solidFill>
+                  <a:srgbClr val="98C379"/>
+                </a:solidFill>
+                <a:effectLst/>
+                <a:latin typeface="D2Coding ligature" panose="020B0609020101020101" pitchFamily="49" charset="-127"/>
+                <a:ea typeface="D2Coding ligature" panose="020B0609020101020101" pitchFamily="49" charset="-127"/>
+              </a:rPr>
+              <a:t>제목을 입력하세요</a:t>
+            </a:r>
+            <a:r>
+              <a:rPr lang="en-US" altLang="ko-KR" sz="1200" b="0" dirty="0">
+                <a:solidFill>
+                  <a:srgbClr val="98C379"/>
+                </a:solidFill>
+                <a:effectLst/>
+                <a:latin typeface="D2Coding ligature" panose="020B0609020101020101" pitchFamily="49" charset="-127"/>
+                <a:ea typeface="D2Coding ligature" panose="020B0609020101020101" pitchFamily="49" charset="-127"/>
+              </a:rPr>
+              <a:t>"</a:t>
+            </a:r>
+            <a:r>
+              <a:rPr lang="en-US" altLang="ko-KR" sz="1200" b="0" dirty="0">
+                <a:solidFill>
+                  <a:srgbClr val="ABB2BF"/>
+                </a:solidFill>
+                <a:effectLst/>
+                <a:latin typeface="D2Coding ligature" panose="020B0609020101020101" pitchFamily="49" charset="-127"/>
+                <a:ea typeface="D2Coding ligature" panose="020B0609020101020101" pitchFamily="49" charset="-127"/>
+              </a:rPr>
+              <a:t>);</a:t>
+            </a:r>
+          </a:p>
+          <a:p>
+            <a:pPr>
+              <a:lnSpc>
+                <a:spcPts val="1650"/>
+              </a:lnSpc>
+              <a:buNone/>
+            </a:pPr>
+            <a:r>
+              <a:rPr lang="en-US" altLang="ko-KR" sz="1200" b="0" dirty="0">
+                <a:solidFill>
+                  <a:srgbClr val="ABB2BF"/>
+                </a:solidFill>
+                <a:effectLst/>
+                <a:latin typeface="D2Coding ligature" panose="020B0609020101020101" pitchFamily="49" charset="-127"/>
+                <a:ea typeface="D2Coding ligature" panose="020B0609020101020101" pitchFamily="49" charset="-127"/>
+              </a:rPr>
+              <a:t>  }</a:t>
+            </a:r>
+            <a:r>
+              <a:rPr lang="en-US" altLang="ko-KR" sz="1200" b="0" dirty="0">
+                <a:solidFill>
+                  <a:srgbClr val="C678DD"/>
+                </a:solidFill>
+                <a:effectLst/>
+                <a:latin typeface="D2Coding ligature" panose="020B0609020101020101" pitchFamily="49" charset="-127"/>
+                <a:ea typeface="D2Coding ligature" panose="020B0609020101020101" pitchFamily="49" charset="-127"/>
+              </a:rPr>
+              <a:t>else</a:t>
+            </a:r>
+            <a:r>
+              <a:rPr lang="en-US" altLang="ko-KR" sz="1200" b="0" dirty="0">
+                <a:solidFill>
+                  <a:srgbClr val="ABB2BF"/>
+                </a:solidFill>
+                <a:effectLst/>
+                <a:latin typeface="D2Coding ligature" panose="020B0609020101020101" pitchFamily="49" charset="-127"/>
+                <a:ea typeface="D2Coding ligature" panose="020B0609020101020101" pitchFamily="49" charset="-127"/>
+              </a:rPr>
+              <a:t>{</a:t>
+            </a:r>
+          </a:p>
+          <a:p>
+            <a:pPr>
+              <a:lnSpc>
+                <a:spcPts val="1650"/>
+              </a:lnSpc>
+              <a:buNone/>
+            </a:pPr>
+            <a:r>
+              <a:rPr lang="en-US" altLang="ko-KR" sz="1200" b="0" dirty="0">
+                <a:solidFill>
+                  <a:srgbClr val="ABB2BF"/>
+                </a:solidFill>
+                <a:effectLst/>
+                <a:latin typeface="D2Coding ligature" panose="020B0609020101020101" pitchFamily="49" charset="-127"/>
+                <a:ea typeface="D2Coding ligature" panose="020B0609020101020101" pitchFamily="49" charset="-127"/>
+              </a:rPr>
+              <a:t>    </a:t>
+            </a:r>
+            <a:r>
+              <a:rPr lang="en-US" altLang="ko-KR" sz="1200" b="0" dirty="0">
+                <a:solidFill>
+                  <a:srgbClr val="56B6C2"/>
+                </a:solidFill>
+                <a:effectLst/>
+                <a:latin typeface="D2Coding ligature" panose="020B0609020101020101" pitchFamily="49" charset="-127"/>
+                <a:ea typeface="D2Coding ligature" panose="020B0609020101020101" pitchFamily="49" charset="-127"/>
+              </a:rPr>
+              <a:t>alert</a:t>
+            </a:r>
+            <a:r>
+              <a:rPr lang="en-US" altLang="ko-KR" sz="1200" b="0" dirty="0">
+                <a:solidFill>
+                  <a:srgbClr val="ABB2BF"/>
+                </a:solidFill>
+                <a:effectLst/>
+                <a:latin typeface="D2Coding ligature" panose="020B0609020101020101" pitchFamily="49" charset="-127"/>
+                <a:ea typeface="D2Coding ligature" panose="020B0609020101020101" pitchFamily="49" charset="-127"/>
+              </a:rPr>
+              <a:t>(</a:t>
+            </a:r>
+            <a:r>
+              <a:rPr lang="en-US" altLang="ko-KR" sz="1200" b="0" dirty="0">
+                <a:solidFill>
+                  <a:srgbClr val="98C379"/>
+                </a:solidFill>
+                <a:effectLst/>
+                <a:latin typeface="D2Coding ligature" panose="020B0609020101020101" pitchFamily="49" charset="-127"/>
+                <a:ea typeface="D2Coding ligature" panose="020B0609020101020101" pitchFamily="49" charset="-127"/>
+              </a:rPr>
+              <a:t>"</a:t>
+            </a:r>
+            <a:r>
+              <a:rPr lang="ko-KR" altLang="en-US" sz="1200" b="0" dirty="0">
+                <a:solidFill>
+                  <a:srgbClr val="98C379"/>
+                </a:solidFill>
+                <a:effectLst/>
+                <a:latin typeface="D2Coding ligature" panose="020B0609020101020101" pitchFamily="49" charset="-127"/>
+                <a:ea typeface="D2Coding ligature" panose="020B0609020101020101" pitchFamily="49" charset="-127"/>
+              </a:rPr>
+              <a:t>리뷰 등록을 완료했습니다</a:t>
+            </a:r>
+            <a:r>
+              <a:rPr lang="en-US" altLang="ko-KR" sz="1200" b="0" dirty="0">
+                <a:solidFill>
+                  <a:srgbClr val="98C379"/>
+                </a:solidFill>
+                <a:effectLst/>
+                <a:latin typeface="D2Coding ligature" panose="020B0609020101020101" pitchFamily="49" charset="-127"/>
+                <a:ea typeface="D2Coding ligature" panose="020B0609020101020101" pitchFamily="49" charset="-127"/>
+              </a:rPr>
+              <a:t>."</a:t>
+            </a:r>
+            <a:r>
+              <a:rPr lang="en-US" altLang="ko-KR" sz="1200" b="0" dirty="0">
+                <a:solidFill>
+                  <a:srgbClr val="ABB2BF"/>
+                </a:solidFill>
+                <a:effectLst/>
+                <a:latin typeface="D2Coding ligature" panose="020B0609020101020101" pitchFamily="49" charset="-127"/>
+                <a:ea typeface="D2Coding ligature" panose="020B0609020101020101" pitchFamily="49" charset="-127"/>
+              </a:rPr>
+              <a:t>);</a:t>
+            </a:r>
+          </a:p>
+          <a:p>
+            <a:pPr>
+              <a:lnSpc>
+                <a:spcPts val="1650"/>
+              </a:lnSpc>
+              <a:buNone/>
+            </a:pPr>
+            <a:r>
+              <a:rPr lang="en-US" altLang="ko-KR" sz="1200" b="0" dirty="0">
+                <a:solidFill>
+                  <a:srgbClr val="ABB2BF"/>
+                </a:solidFill>
+                <a:effectLst/>
+                <a:latin typeface="D2Coding ligature" panose="020B0609020101020101" pitchFamily="49" charset="-127"/>
+                <a:ea typeface="D2Coding ligature" panose="020B0609020101020101" pitchFamily="49" charset="-127"/>
+              </a:rPr>
+              <a:t>    </a:t>
+            </a:r>
+            <a:r>
+              <a:rPr lang="en-US" altLang="ko-KR" sz="1200" b="0" dirty="0" err="1">
+                <a:solidFill>
+                  <a:srgbClr val="E5C07B"/>
+                </a:solidFill>
+                <a:effectLst/>
+                <a:latin typeface="D2Coding ligature" panose="020B0609020101020101" pitchFamily="49" charset="-127"/>
+                <a:ea typeface="D2Coding ligature" panose="020B0609020101020101" pitchFamily="49" charset="-127"/>
+              </a:rPr>
+              <a:t>document</a:t>
+            </a:r>
+            <a:r>
+              <a:rPr lang="en-US" altLang="ko-KR" sz="1200" b="0" dirty="0" err="1">
+                <a:solidFill>
+                  <a:srgbClr val="ABB2BF"/>
+                </a:solidFill>
+                <a:effectLst/>
+                <a:latin typeface="D2Coding ligature" panose="020B0609020101020101" pitchFamily="49" charset="-127"/>
+                <a:ea typeface="D2Coding ligature" panose="020B0609020101020101" pitchFamily="49" charset="-127"/>
+              </a:rPr>
+              <a:t>.</a:t>
+            </a:r>
+            <a:r>
+              <a:rPr lang="en-US" altLang="ko-KR" sz="1200" b="0" dirty="0" err="1">
+                <a:solidFill>
+                  <a:srgbClr val="61AFEF"/>
+                </a:solidFill>
+                <a:effectLst/>
+                <a:latin typeface="D2Coding ligature" panose="020B0609020101020101" pitchFamily="49" charset="-127"/>
+                <a:ea typeface="D2Coding ligature" panose="020B0609020101020101" pitchFamily="49" charset="-127"/>
+              </a:rPr>
+              <a:t>querySelector</a:t>
+            </a:r>
+            <a:r>
+              <a:rPr lang="en-US" altLang="ko-KR" sz="1200" b="0" dirty="0">
+                <a:solidFill>
+                  <a:srgbClr val="ABB2BF"/>
+                </a:solidFill>
+                <a:effectLst/>
+                <a:latin typeface="D2Coding ligature" panose="020B0609020101020101" pitchFamily="49" charset="-127"/>
+                <a:ea typeface="D2Coding ligature" panose="020B0609020101020101" pitchFamily="49" charset="-127"/>
+              </a:rPr>
+              <a:t>(</a:t>
+            </a:r>
+            <a:r>
+              <a:rPr lang="en-US" altLang="ko-KR" sz="1200" b="0" dirty="0">
+                <a:solidFill>
+                  <a:srgbClr val="98C379"/>
+                </a:solidFill>
+                <a:effectLst/>
+                <a:latin typeface="D2Coding ligature" panose="020B0609020101020101" pitchFamily="49" charset="-127"/>
+                <a:ea typeface="D2Coding ligature" panose="020B0609020101020101" pitchFamily="49" charset="-127"/>
+              </a:rPr>
+              <a:t>".modal-	background"</a:t>
+            </a:r>
+            <a:r>
+              <a:rPr lang="en-US" altLang="ko-KR" sz="1200" b="0" dirty="0">
+                <a:solidFill>
+                  <a:srgbClr val="ABB2BF"/>
+                </a:solidFill>
+                <a:effectLst/>
+                <a:latin typeface="D2Coding ligature" panose="020B0609020101020101" pitchFamily="49" charset="-127"/>
+                <a:ea typeface="D2Coding ligature" panose="020B0609020101020101" pitchFamily="49" charset="-127"/>
+              </a:rPr>
+              <a:t>).</a:t>
+            </a:r>
+            <a:r>
+              <a:rPr lang="en-US" altLang="ko-KR" sz="1200" b="0" dirty="0" err="1">
+                <a:solidFill>
+                  <a:srgbClr val="E06C75"/>
+                </a:solidFill>
+                <a:effectLst/>
+                <a:latin typeface="D2Coding ligature" panose="020B0609020101020101" pitchFamily="49" charset="-127"/>
+                <a:ea typeface="D2Coding ligature" panose="020B0609020101020101" pitchFamily="49" charset="-127"/>
+              </a:rPr>
+              <a:t>classList</a:t>
+            </a:r>
+            <a:r>
+              <a:rPr lang="en-US" altLang="ko-KR" sz="1200" b="0" dirty="0" err="1">
+                <a:solidFill>
+                  <a:srgbClr val="ABB2BF"/>
+                </a:solidFill>
+                <a:effectLst/>
+                <a:latin typeface="D2Coding ligature" panose="020B0609020101020101" pitchFamily="49" charset="-127"/>
+                <a:ea typeface="D2Coding ligature" panose="020B0609020101020101" pitchFamily="49" charset="-127"/>
+              </a:rPr>
+              <a:t>.</a:t>
+            </a:r>
+            <a:r>
+              <a:rPr lang="en-US" altLang="ko-KR" sz="1200" b="0" dirty="0" err="1">
+                <a:solidFill>
+                  <a:srgbClr val="61AFEF"/>
+                </a:solidFill>
+                <a:effectLst/>
+                <a:latin typeface="D2Coding ligature" panose="020B0609020101020101" pitchFamily="49" charset="-127"/>
+                <a:ea typeface="D2Coding ligature" panose="020B0609020101020101" pitchFamily="49" charset="-127"/>
+              </a:rPr>
+              <a:t>remove</a:t>
+            </a:r>
+            <a:r>
+              <a:rPr lang="en-US" altLang="ko-KR" sz="1200" b="0" dirty="0">
+                <a:solidFill>
+                  <a:srgbClr val="ABB2BF"/>
+                </a:solidFill>
+                <a:effectLst/>
+                <a:latin typeface="D2Coding ligature" panose="020B0609020101020101" pitchFamily="49" charset="-127"/>
+                <a:ea typeface="D2Coding ligature" panose="020B0609020101020101" pitchFamily="49" charset="-127"/>
+              </a:rPr>
+              <a:t>(</a:t>
+            </a:r>
+            <a:r>
+              <a:rPr lang="en-US" altLang="ko-KR" sz="1200" b="0" dirty="0">
+                <a:solidFill>
+                  <a:srgbClr val="98C379"/>
+                </a:solidFill>
+                <a:effectLst/>
+                <a:latin typeface="D2Coding ligature" panose="020B0609020101020101" pitchFamily="49" charset="-127"/>
+                <a:ea typeface="D2Coding ligature" panose="020B0609020101020101" pitchFamily="49" charset="-127"/>
+              </a:rPr>
+              <a:t>"active"</a:t>
+            </a:r>
+            <a:r>
+              <a:rPr lang="en-US" altLang="ko-KR" sz="1200" b="0" dirty="0">
+                <a:solidFill>
+                  <a:srgbClr val="ABB2BF"/>
+                </a:solidFill>
+                <a:effectLst/>
+                <a:latin typeface="D2Coding ligature" panose="020B0609020101020101" pitchFamily="49" charset="-127"/>
+                <a:ea typeface="D2Coding ligature" panose="020B0609020101020101" pitchFamily="49" charset="-127"/>
+              </a:rPr>
+              <a:t>);</a:t>
+            </a:r>
+          </a:p>
+          <a:p>
+            <a:pPr>
+              <a:lnSpc>
+                <a:spcPts val="1650"/>
+              </a:lnSpc>
+              <a:buNone/>
+            </a:pPr>
+            <a:r>
+              <a:rPr lang="en-US" altLang="ko-KR" sz="1200" b="0" dirty="0">
+                <a:solidFill>
+                  <a:srgbClr val="ABB2BF"/>
+                </a:solidFill>
+                <a:effectLst/>
+                <a:latin typeface="D2Coding ligature" panose="020B0609020101020101" pitchFamily="49" charset="-127"/>
+                <a:ea typeface="D2Coding ligature" panose="020B0609020101020101" pitchFamily="49" charset="-127"/>
+              </a:rPr>
+              <a:t>  }</a:t>
+            </a:r>
+          </a:p>
+          <a:p>
+            <a:pPr>
+              <a:lnSpc>
+                <a:spcPts val="1650"/>
+              </a:lnSpc>
+              <a:buNone/>
+            </a:pPr>
+            <a:r>
+              <a:rPr lang="en-US" altLang="ko-KR" sz="1200" b="0" dirty="0">
+                <a:solidFill>
+                  <a:srgbClr val="ABB2BF"/>
+                </a:solidFill>
+                <a:effectLst/>
+                <a:latin typeface="D2Coding ligature" panose="020B0609020101020101" pitchFamily="49" charset="-127"/>
+                <a:ea typeface="D2Coding ligature" panose="020B0609020101020101" pitchFamily="49" charset="-127"/>
+              </a:rPr>
+              <a:t>}</a:t>
+            </a:r>
+          </a:p>
+        </p:txBody>
+      </p:sp>
+    </p:spTree>
+    <p:extLst>
+      <p:ext uri="{BB962C8B-B14F-4D97-AF65-F5344CB8AC3E}">
+        <p14:creationId xmlns:p14="http://schemas.microsoft.com/office/powerpoint/2010/main" val="807463599"/>
+      </p:ext>
+    </p:extLst>
+  </p:cSld>
+  <p:clrMapOvr>
+    <a:masterClrMapping/>
+  </p:clrMapOvr>
+</p:sld>
+</file>
+
 <file path=ppt/slides/slide2.xml><?xml version="1.0" encoding="utf-8"?>
 <p:sld xmlns:a="http://schemas.openxmlformats.org/drawingml/2006/main" xmlns:r="http://schemas.openxmlformats.org/officeDocument/2006/relationships" xmlns:p="http://schemas.openxmlformats.org/presentationml/2006/main">
   <p:cSld>
@@ -8447,6 +9919,1304 @@
         <p:cNvPr id="1" name="">
           <a:extLst>
             <a:ext uri="{FF2B5EF4-FFF2-40B4-BE49-F238E27FC236}">
+              <a16:creationId xmlns:a16="http://schemas.microsoft.com/office/drawing/2014/main" id="{534A7138-5B1B-0DAD-9AAF-D8C50F4FB2DA}"/>
+            </a:ext>
+          </a:extLst>
+        </p:cNvPr>
+        <p:cNvGrpSpPr/>
+        <p:nvPr/>
+      </p:nvGrpSpPr>
+      <p:grpSpPr>
+        <a:xfrm>
+          <a:off x="0" y="0"/>
+          <a:ext cx="0" cy="0"/>
+          <a:chOff x="0" y="0"/>
+          <a:chExt cx="0" cy="0"/>
+        </a:xfrm>
+      </p:grpSpPr>
+      <p:pic>
+        <p:nvPicPr>
+          <p:cNvPr id="5" name="그림 4" descr="텍스트, 스크린샷, 의류, 사람이(가) 표시된 사진&#10;&#10;AI 생성 콘텐츠는 정확하지 않을 수 있습니다.">
+            <a:extLst>
+              <a:ext uri="{FF2B5EF4-FFF2-40B4-BE49-F238E27FC236}">
+                <a16:creationId xmlns:a16="http://schemas.microsoft.com/office/drawing/2014/main" id="{366A3C00-D998-742E-009F-839B75570B9B}"/>
+              </a:ext>
+            </a:extLst>
+          </p:cNvPr>
+          <p:cNvPicPr>
+            <a:picLocks noChangeAspect="1"/>
+          </p:cNvPicPr>
+          <p:nvPr/>
+        </p:nvPicPr>
+        <p:blipFill>
+          <a:blip r:embed="rId2">
+            <a:extLst>
+              <a:ext uri="{28A0092B-C50C-407E-A947-70E740481C1C}">
+                <a14:useLocalDpi xmlns:a14="http://schemas.microsoft.com/office/drawing/2010/main" val="0"/>
+              </a:ext>
+            </a:extLst>
+          </a:blip>
+          <a:stretch>
+            <a:fillRect/>
+          </a:stretch>
+        </p:blipFill>
+        <p:spPr>
+          <a:xfrm>
+            <a:off x="0" y="1492468"/>
+            <a:ext cx="7406030" cy="5365531"/>
+          </a:xfrm>
+          <a:prstGeom prst="rect">
+            <a:avLst/>
+          </a:prstGeom>
+        </p:spPr>
+      </p:pic>
+      <p:sp>
+        <p:nvSpPr>
+          <p:cNvPr id="8" name="TextBox 7">
+            <a:extLst>
+              <a:ext uri="{FF2B5EF4-FFF2-40B4-BE49-F238E27FC236}">
+                <a16:creationId xmlns:a16="http://schemas.microsoft.com/office/drawing/2014/main" id="{720D4876-8D21-948C-72B3-4CEC13670F0B}"/>
+              </a:ext>
+            </a:extLst>
+          </p:cNvPr>
+          <p:cNvSpPr txBox="1"/>
+          <p:nvPr/>
+        </p:nvSpPr>
+        <p:spPr>
+          <a:xfrm>
+            <a:off x="163201" y="158513"/>
+            <a:ext cx="2832247" cy="461665"/>
+          </a:xfrm>
+          <a:prstGeom prst="rect">
+            <a:avLst/>
+          </a:prstGeom>
+          <a:noFill/>
+        </p:spPr>
+        <p:txBody>
+          <a:bodyPr wrap="square" rtlCol="0">
+            <a:spAutoFit/>
+          </a:bodyPr>
+          <a:lstStyle/>
+          <a:p>
+            <a:r>
+              <a:rPr lang="en-US" altLang="ko-KR" sz="2400" dirty="0">
+                <a:solidFill>
+                  <a:schemeClr val="bg1"/>
+                </a:solidFill>
+              </a:rPr>
+              <a:t>detail.html</a:t>
+            </a:r>
+            <a:endParaRPr lang="ko-KR" altLang="en-US" sz="2400" dirty="0">
+              <a:solidFill>
+                <a:schemeClr val="bg1"/>
+              </a:solidFill>
+            </a:endParaRPr>
+          </a:p>
+        </p:txBody>
+      </p:sp>
+      <p:sp>
+        <p:nvSpPr>
+          <p:cNvPr id="11" name="직사각형 10">
+            <a:extLst>
+              <a:ext uri="{FF2B5EF4-FFF2-40B4-BE49-F238E27FC236}">
+                <a16:creationId xmlns:a16="http://schemas.microsoft.com/office/drawing/2014/main" id="{E796C976-9D90-6180-FBD3-223CB27A43A6}"/>
+              </a:ext>
+            </a:extLst>
+          </p:cNvPr>
+          <p:cNvSpPr/>
+          <p:nvPr/>
+        </p:nvSpPr>
+        <p:spPr>
+          <a:xfrm>
+            <a:off x="4884842" y="3870006"/>
+            <a:ext cx="2521188" cy="1108393"/>
+          </a:xfrm>
+          <a:prstGeom prst="rect">
+            <a:avLst/>
+          </a:prstGeom>
+          <a:noFill/>
+          <a:ln>
+            <a:solidFill>
+              <a:srgbClr val="FF0000"/>
+            </a:solidFill>
+          </a:ln>
+        </p:spPr>
+        <p:style>
+          <a:lnRef idx="2">
+            <a:schemeClr val="accent1">
+              <a:shade val="15000"/>
+            </a:schemeClr>
+          </a:lnRef>
+          <a:fillRef idx="1">
+            <a:schemeClr val="accent1"/>
+          </a:fillRef>
+          <a:effectRef idx="0">
+            <a:schemeClr val="accent1"/>
+          </a:effectRef>
+          <a:fontRef idx="minor">
+            <a:schemeClr val="lt1"/>
+          </a:fontRef>
+        </p:style>
+        <p:txBody>
+          <a:bodyPr rtlCol="0" anchor="ctr"/>
+          <a:lstStyle/>
+          <a:p>
+            <a:pPr algn="ctr"/>
+            <a:endParaRPr lang="ko-KR" altLang="en-US"/>
+          </a:p>
+        </p:txBody>
+      </p:sp>
+      <p:cxnSp>
+        <p:nvCxnSpPr>
+          <p:cNvPr id="23" name="직선 화살표 연결선 22">
+            <a:extLst>
+              <a:ext uri="{FF2B5EF4-FFF2-40B4-BE49-F238E27FC236}">
+                <a16:creationId xmlns:a16="http://schemas.microsoft.com/office/drawing/2014/main" id="{D4E0B7F6-22D2-93B3-F614-606AAC55C918}"/>
+              </a:ext>
+            </a:extLst>
+          </p:cNvPr>
+          <p:cNvCxnSpPr>
+            <a:cxnSpLocks/>
+            <a:stCxn id="11" idx="3"/>
+            <a:endCxn id="12" idx="1"/>
+          </p:cNvCxnSpPr>
+          <p:nvPr/>
+        </p:nvCxnSpPr>
+        <p:spPr>
+          <a:xfrm flipV="1">
+            <a:off x="7406030" y="3791527"/>
+            <a:ext cx="814334" cy="632676"/>
+          </a:xfrm>
+          <a:prstGeom prst="straightConnector1">
+            <a:avLst/>
+          </a:prstGeom>
+          <a:ln>
+            <a:solidFill>
+              <a:srgbClr val="FF0000"/>
+            </a:solidFill>
+            <a:tailEnd type="triangle"/>
+          </a:ln>
+        </p:spPr>
+        <p:style>
+          <a:lnRef idx="2">
+            <a:schemeClr val="accent1"/>
+          </a:lnRef>
+          <a:fillRef idx="0">
+            <a:schemeClr val="accent1"/>
+          </a:fillRef>
+          <a:effectRef idx="1">
+            <a:schemeClr val="accent1"/>
+          </a:effectRef>
+          <a:fontRef idx="minor">
+            <a:schemeClr val="tx1"/>
+          </a:fontRef>
+        </p:style>
+      </p:cxnSp>
+      <p:sp>
+        <p:nvSpPr>
+          <p:cNvPr id="32" name="TextBox 31">
+            <a:extLst>
+              <a:ext uri="{FF2B5EF4-FFF2-40B4-BE49-F238E27FC236}">
+                <a16:creationId xmlns:a16="http://schemas.microsoft.com/office/drawing/2014/main" id="{58D9E716-D6BC-A94F-D586-8AD632814FA5}"/>
+              </a:ext>
+            </a:extLst>
+          </p:cNvPr>
+          <p:cNvSpPr txBox="1"/>
+          <p:nvPr/>
+        </p:nvSpPr>
+        <p:spPr>
+          <a:xfrm>
+            <a:off x="4028458" y="241123"/>
+            <a:ext cx="3377572" cy="454292"/>
+          </a:xfrm>
+          <a:prstGeom prst="rect">
+            <a:avLst/>
+          </a:prstGeom>
+          <a:noFill/>
+        </p:spPr>
+        <p:txBody>
+          <a:bodyPr wrap="square" rtlCol="0">
+            <a:spAutoFit/>
+          </a:bodyPr>
+          <a:lstStyle/>
+          <a:p>
+            <a:pPr>
+              <a:lnSpc>
+                <a:spcPct val="150000"/>
+              </a:lnSpc>
+            </a:pPr>
+            <a:r>
+              <a:rPr lang="en-US" altLang="ko-KR" dirty="0">
+                <a:solidFill>
+                  <a:schemeClr val="bg1"/>
+                </a:solidFill>
+              </a:rPr>
+              <a:t>Swiper </a:t>
+            </a:r>
+            <a:r>
+              <a:rPr lang="ko-KR" altLang="en-US" dirty="0">
+                <a:solidFill>
+                  <a:schemeClr val="bg1"/>
+                </a:solidFill>
+              </a:rPr>
+              <a:t>사용</a:t>
+            </a:r>
+          </a:p>
+        </p:txBody>
+      </p:sp>
+      <p:sp>
+        <p:nvSpPr>
+          <p:cNvPr id="34" name="TextBox 33">
+            <a:extLst>
+              <a:ext uri="{FF2B5EF4-FFF2-40B4-BE49-F238E27FC236}">
+                <a16:creationId xmlns:a16="http://schemas.microsoft.com/office/drawing/2014/main" id="{D2A9ADE3-2627-D70C-32E8-853D782F23FD}"/>
+              </a:ext>
+            </a:extLst>
+          </p:cNvPr>
+          <p:cNvSpPr txBox="1"/>
+          <p:nvPr/>
+        </p:nvSpPr>
+        <p:spPr>
+          <a:xfrm>
+            <a:off x="7406030" y="487845"/>
+            <a:ext cx="2064993" cy="454292"/>
+          </a:xfrm>
+          <a:prstGeom prst="rect">
+            <a:avLst/>
+          </a:prstGeom>
+          <a:noFill/>
+        </p:spPr>
+        <p:txBody>
+          <a:bodyPr wrap="square" rtlCol="0">
+            <a:spAutoFit/>
+          </a:bodyPr>
+          <a:lstStyle/>
+          <a:p>
+            <a:pPr>
+              <a:lnSpc>
+                <a:spcPct val="150000"/>
+              </a:lnSpc>
+            </a:pPr>
+            <a:r>
+              <a:rPr lang="en-US" altLang="ko-KR" dirty="0">
+                <a:solidFill>
+                  <a:schemeClr val="bg1"/>
+                </a:solidFill>
+              </a:rPr>
+              <a:t>detail.css</a:t>
+            </a:r>
+            <a:endParaRPr lang="ko-KR" altLang="en-US" dirty="0">
+              <a:solidFill>
+                <a:schemeClr val="bg1"/>
+              </a:solidFill>
+            </a:endParaRPr>
+          </a:p>
+        </p:txBody>
+      </p:sp>
+      <p:sp>
+        <p:nvSpPr>
+          <p:cNvPr id="12" name="TextBox 11">
+            <a:extLst>
+              <a:ext uri="{FF2B5EF4-FFF2-40B4-BE49-F238E27FC236}">
+                <a16:creationId xmlns:a16="http://schemas.microsoft.com/office/drawing/2014/main" id="{FA9000B8-D524-945F-066F-3775E1955348}"/>
+              </a:ext>
+            </a:extLst>
+          </p:cNvPr>
+          <p:cNvSpPr txBox="1"/>
+          <p:nvPr/>
+        </p:nvSpPr>
+        <p:spPr>
+          <a:xfrm>
+            <a:off x="8220364" y="1016825"/>
+            <a:ext cx="3759200" cy="5549404"/>
+          </a:xfrm>
+          <a:prstGeom prst="rect">
+            <a:avLst/>
+          </a:prstGeom>
+          <a:noFill/>
+        </p:spPr>
+        <p:txBody>
+          <a:bodyPr wrap="square">
+            <a:spAutoFit/>
+          </a:bodyPr>
+          <a:lstStyle/>
+          <a:p>
+            <a:pPr>
+              <a:lnSpc>
+                <a:spcPts val="1650"/>
+              </a:lnSpc>
+              <a:buNone/>
+            </a:pPr>
+            <a:r>
+              <a:rPr lang="en-US" altLang="ko-KR" sz="1400" b="0" dirty="0">
+                <a:solidFill>
+                  <a:srgbClr val="D19A66"/>
+                </a:solidFill>
+                <a:effectLst/>
+                <a:latin typeface="D2Coding ligature" panose="020B0609020101020101" pitchFamily="49" charset="-127"/>
+                <a:ea typeface="D2Coding ligature" panose="020B0609020101020101" pitchFamily="49" charset="-127"/>
+              </a:rPr>
+              <a:t>.swiper</a:t>
+            </a:r>
+            <a:r>
+              <a:rPr lang="en-US" altLang="ko-KR" sz="1400" b="0" dirty="0">
+                <a:solidFill>
+                  <a:srgbClr val="ABB2BF"/>
+                </a:solidFill>
+                <a:effectLst/>
+                <a:latin typeface="D2Coding ligature" panose="020B0609020101020101" pitchFamily="49" charset="-127"/>
+                <a:ea typeface="D2Coding ligature" panose="020B0609020101020101" pitchFamily="49" charset="-127"/>
+              </a:rPr>
+              <a:t> {</a:t>
+            </a:r>
+          </a:p>
+          <a:p>
+            <a:pPr>
+              <a:lnSpc>
+                <a:spcPts val="1650"/>
+              </a:lnSpc>
+              <a:buNone/>
+            </a:pPr>
+            <a:r>
+              <a:rPr lang="en-US" altLang="ko-KR" sz="1400" b="0" dirty="0">
+                <a:solidFill>
+                  <a:srgbClr val="ABB2BF"/>
+                </a:solidFill>
+                <a:effectLst/>
+                <a:latin typeface="D2Coding ligature" panose="020B0609020101020101" pitchFamily="49" charset="-127"/>
+                <a:ea typeface="D2Coding ligature" panose="020B0609020101020101" pitchFamily="49" charset="-127"/>
+              </a:rPr>
+              <a:t>  width: </a:t>
+            </a:r>
+            <a:r>
+              <a:rPr lang="en-US" altLang="ko-KR" sz="1400" b="0" dirty="0">
+                <a:solidFill>
+                  <a:srgbClr val="D19A66"/>
+                </a:solidFill>
+                <a:effectLst/>
+                <a:latin typeface="D2Coding ligature" panose="020B0609020101020101" pitchFamily="49" charset="-127"/>
+                <a:ea typeface="D2Coding ligature" panose="020B0609020101020101" pitchFamily="49" charset="-127"/>
+              </a:rPr>
+              <a:t>100</a:t>
+            </a:r>
+            <a:r>
+              <a:rPr lang="en-US" altLang="ko-KR" sz="1400" b="0" dirty="0">
+                <a:solidFill>
+                  <a:srgbClr val="E06C75"/>
+                </a:solidFill>
+                <a:effectLst/>
+                <a:latin typeface="D2Coding ligature" panose="020B0609020101020101" pitchFamily="49" charset="-127"/>
+                <a:ea typeface="D2Coding ligature" panose="020B0609020101020101" pitchFamily="49" charset="-127"/>
+              </a:rPr>
+              <a:t>%</a:t>
+            </a:r>
+            <a:r>
+              <a:rPr lang="en-US" altLang="ko-KR" sz="1400" b="0" dirty="0">
+                <a:solidFill>
+                  <a:srgbClr val="ABB2BF"/>
+                </a:solidFill>
+                <a:effectLst/>
+                <a:latin typeface="D2Coding ligature" panose="020B0609020101020101" pitchFamily="49" charset="-127"/>
+                <a:ea typeface="D2Coding ligature" panose="020B0609020101020101" pitchFamily="49" charset="-127"/>
+              </a:rPr>
+              <a:t>;</a:t>
+            </a:r>
+          </a:p>
+          <a:p>
+            <a:pPr>
+              <a:lnSpc>
+                <a:spcPts val="1650"/>
+              </a:lnSpc>
+              <a:buNone/>
+            </a:pPr>
+            <a:r>
+              <a:rPr lang="en-US" altLang="ko-KR" sz="1400" b="0" dirty="0">
+                <a:solidFill>
+                  <a:srgbClr val="ABB2BF"/>
+                </a:solidFill>
+                <a:effectLst/>
+                <a:latin typeface="D2Coding ligature" panose="020B0609020101020101" pitchFamily="49" charset="-127"/>
+                <a:ea typeface="D2Coding ligature" panose="020B0609020101020101" pitchFamily="49" charset="-127"/>
+              </a:rPr>
+              <a:t>  height: </a:t>
+            </a:r>
+            <a:r>
+              <a:rPr lang="en-US" altLang="ko-KR" sz="1400" b="0" dirty="0">
+                <a:solidFill>
+                  <a:srgbClr val="D19A66"/>
+                </a:solidFill>
+                <a:effectLst/>
+                <a:latin typeface="D2Coding ligature" panose="020B0609020101020101" pitchFamily="49" charset="-127"/>
+                <a:ea typeface="D2Coding ligature" panose="020B0609020101020101" pitchFamily="49" charset="-127"/>
+              </a:rPr>
+              <a:t>auto</a:t>
+            </a:r>
+            <a:r>
+              <a:rPr lang="en-US" altLang="ko-KR" sz="1400" b="0" dirty="0">
+                <a:solidFill>
+                  <a:srgbClr val="ABB2BF"/>
+                </a:solidFill>
+                <a:effectLst/>
+                <a:latin typeface="D2Coding ligature" panose="020B0609020101020101" pitchFamily="49" charset="-127"/>
+                <a:ea typeface="D2Coding ligature" panose="020B0609020101020101" pitchFamily="49" charset="-127"/>
+              </a:rPr>
+              <a:t>;</a:t>
+            </a:r>
+          </a:p>
+          <a:p>
+            <a:pPr>
+              <a:lnSpc>
+                <a:spcPts val="1650"/>
+              </a:lnSpc>
+              <a:buNone/>
+            </a:pPr>
+            <a:r>
+              <a:rPr lang="en-US" altLang="ko-KR" sz="1400" b="0" dirty="0">
+                <a:solidFill>
+                  <a:srgbClr val="ABB2BF"/>
+                </a:solidFill>
+                <a:effectLst/>
+                <a:latin typeface="D2Coding ligature" panose="020B0609020101020101" pitchFamily="49" charset="-127"/>
+                <a:ea typeface="D2Coding ligature" panose="020B0609020101020101" pitchFamily="49" charset="-127"/>
+              </a:rPr>
+              <a:t>  </a:t>
+            </a:r>
+            <a:r>
+              <a:rPr lang="en-US" altLang="ko-KR" sz="1400" b="0" dirty="0">
+                <a:solidFill>
+                  <a:srgbClr val="E06C75"/>
+                </a:solidFill>
+                <a:effectLst/>
+                <a:latin typeface="D2Coding ligature" panose="020B0609020101020101" pitchFamily="49" charset="-127"/>
+                <a:ea typeface="D2Coding ligature" panose="020B0609020101020101" pitchFamily="49" charset="-127"/>
+              </a:rPr>
+              <a:t>--swiper-navigation-size</a:t>
+            </a:r>
+            <a:r>
+              <a:rPr lang="en-US" altLang="ko-KR" sz="1400" b="0" dirty="0">
+                <a:solidFill>
+                  <a:srgbClr val="ABB2BF"/>
+                </a:solidFill>
+                <a:effectLst/>
+                <a:latin typeface="D2Coding ligature" panose="020B0609020101020101" pitchFamily="49" charset="-127"/>
+                <a:ea typeface="D2Coding ligature" panose="020B0609020101020101" pitchFamily="49" charset="-127"/>
+              </a:rPr>
+              <a:t>: </a:t>
+            </a:r>
+            <a:r>
+              <a:rPr lang="en-US" altLang="ko-KR" sz="1400" b="0" dirty="0">
+                <a:solidFill>
+                  <a:srgbClr val="D19A66"/>
+                </a:solidFill>
+                <a:effectLst/>
+                <a:latin typeface="D2Coding ligature" panose="020B0609020101020101" pitchFamily="49" charset="-127"/>
+                <a:ea typeface="D2Coding ligature" panose="020B0609020101020101" pitchFamily="49" charset="-127"/>
+              </a:rPr>
+              <a:t>25</a:t>
+            </a:r>
+            <a:r>
+              <a:rPr lang="en-US" altLang="ko-KR" sz="1400" b="0" dirty="0">
+                <a:solidFill>
+                  <a:srgbClr val="E06C75"/>
+                </a:solidFill>
+                <a:effectLst/>
+                <a:latin typeface="D2Coding ligature" panose="020B0609020101020101" pitchFamily="49" charset="-127"/>
+                <a:ea typeface="D2Coding ligature" panose="020B0609020101020101" pitchFamily="49" charset="-127"/>
+              </a:rPr>
+              <a:t>px</a:t>
+            </a:r>
+            <a:r>
+              <a:rPr lang="en-US" altLang="ko-KR" sz="1400" b="0" dirty="0">
+                <a:solidFill>
+                  <a:srgbClr val="ABB2BF"/>
+                </a:solidFill>
+                <a:effectLst/>
+                <a:latin typeface="D2Coding ligature" panose="020B0609020101020101" pitchFamily="49" charset="-127"/>
+                <a:ea typeface="D2Coding ligature" panose="020B0609020101020101" pitchFamily="49" charset="-127"/>
+              </a:rPr>
+              <a:t>;</a:t>
+            </a:r>
+          </a:p>
+          <a:p>
+            <a:pPr>
+              <a:lnSpc>
+                <a:spcPts val="1650"/>
+              </a:lnSpc>
+              <a:buNone/>
+            </a:pPr>
+            <a:r>
+              <a:rPr lang="en-US" altLang="ko-KR" sz="1400" b="0" dirty="0">
+                <a:solidFill>
+                  <a:srgbClr val="ABB2BF"/>
+                </a:solidFill>
+                <a:effectLst/>
+                <a:latin typeface="D2Coding ligature" panose="020B0609020101020101" pitchFamily="49" charset="-127"/>
+                <a:ea typeface="D2Coding ligature" panose="020B0609020101020101" pitchFamily="49" charset="-127"/>
+              </a:rPr>
+              <a:t>  </a:t>
+            </a:r>
+            <a:r>
+              <a:rPr lang="en-US" altLang="ko-KR" sz="1400" b="0" dirty="0">
+                <a:solidFill>
+                  <a:srgbClr val="E06C75"/>
+                </a:solidFill>
+                <a:effectLst/>
+                <a:latin typeface="D2Coding ligature" panose="020B0609020101020101" pitchFamily="49" charset="-127"/>
+                <a:ea typeface="D2Coding ligature" panose="020B0609020101020101" pitchFamily="49" charset="-127"/>
+              </a:rPr>
+              <a:t>--swiper-navigation-color</a:t>
+            </a:r>
+            <a:r>
+              <a:rPr lang="en-US" altLang="ko-KR" sz="1400" b="0" dirty="0">
+                <a:solidFill>
+                  <a:srgbClr val="ABB2BF"/>
+                </a:solidFill>
+                <a:effectLst/>
+                <a:latin typeface="D2Coding ligature" panose="020B0609020101020101" pitchFamily="49" charset="-127"/>
+                <a:ea typeface="D2Coding ligature" panose="020B0609020101020101" pitchFamily="49" charset="-127"/>
+              </a:rPr>
+              <a:t>: </a:t>
+            </a:r>
+            <a:r>
+              <a:rPr lang="en-US" altLang="ko-KR" sz="1400" b="0" dirty="0">
+                <a:solidFill>
+                  <a:srgbClr val="D19A66"/>
+                </a:solidFill>
+                <a:effectLst/>
+                <a:latin typeface="D2Coding ligature" panose="020B0609020101020101" pitchFamily="49" charset="-127"/>
+                <a:ea typeface="D2Coding ligature" panose="020B0609020101020101" pitchFamily="49" charset="-127"/>
+              </a:rPr>
+              <a:t>#000</a:t>
+            </a:r>
+            <a:r>
+              <a:rPr lang="en-US" altLang="ko-KR" sz="1400" b="0" dirty="0">
+                <a:solidFill>
+                  <a:srgbClr val="ABB2BF"/>
+                </a:solidFill>
+                <a:effectLst/>
+                <a:latin typeface="D2Coding ligature" panose="020B0609020101020101" pitchFamily="49" charset="-127"/>
+                <a:ea typeface="D2Coding ligature" panose="020B0609020101020101" pitchFamily="49" charset="-127"/>
+              </a:rPr>
+              <a:t>;</a:t>
+            </a:r>
+          </a:p>
+          <a:p>
+            <a:pPr>
+              <a:lnSpc>
+                <a:spcPts val="1650"/>
+              </a:lnSpc>
+              <a:buNone/>
+            </a:pPr>
+            <a:r>
+              <a:rPr lang="en-US" altLang="ko-KR" sz="1400" b="0" dirty="0">
+                <a:solidFill>
+                  <a:srgbClr val="ABB2BF"/>
+                </a:solidFill>
+                <a:effectLst/>
+                <a:latin typeface="D2Coding ligature" panose="020B0609020101020101" pitchFamily="49" charset="-127"/>
+                <a:ea typeface="D2Coding ligature" panose="020B0609020101020101" pitchFamily="49" charset="-127"/>
+              </a:rPr>
+              <a:t>  margin-bottom: </a:t>
+            </a:r>
+            <a:r>
+              <a:rPr lang="en-US" altLang="ko-KR" sz="1400" b="0" dirty="0">
+                <a:solidFill>
+                  <a:srgbClr val="D19A66"/>
+                </a:solidFill>
+                <a:effectLst/>
+                <a:latin typeface="D2Coding ligature" panose="020B0609020101020101" pitchFamily="49" charset="-127"/>
+                <a:ea typeface="D2Coding ligature" panose="020B0609020101020101" pitchFamily="49" charset="-127"/>
+              </a:rPr>
+              <a:t>60</a:t>
+            </a:r>
+            <a:r>
+              <a:rPr lang="en-US" altLang="ko-KR" sz="1400" b="0" dirty="0">
+                <a:solidFill>
+                  <a:srgbClr val="E06C75"/>
+                </a:solidFill>
+                <a:effectLst/>
+                <a:latin typeface="D2Coding ligature" panose="020B0609020101020101" pitchFamily="49" charset="-127"/>
+                <a:ea typeface="D2Coding ligature" panose="020B0609020101020101" pitchFamily="49" charset="-127"/>
+              </a:rPr>
+              <a:t>px</a:t>
+            </a:r>
+            <a:r>
+              <a:rPr lang="en-US" altLang="ko-KR" sz="1400" b="0" dirty="0">
+                <a:solidFill>
+                  <a:srgbClr val="ABB2BF"/>
+                </a:solidFill>
+                <a:effectLst/>
+                <a:latin typeface="D2Coding ligature" panose="020B0609020101020101" pitchFamily="49" charset="-127"/>
+                <a:ea typeface="D2Coding ligature" panose="020B0609020101020101" pitchFamily="49" charset="-127"/>
+              </a:rPr>
+              <a:t>;</a:t>
+            </a:r>
+          </a:p>
+          <a:p>
+            <a:pPr>
+              <a:lnSpc>
+                <a:spcPts val="1650"/>
+              </a:lnSpc>
+              <a:buNone/>
+            </a:pPr>
+            <a:r>
+              <a:rPr lang="en-US" altLang="ko-KR" sz="1400" b="0" dirty="0">
+                <a:solidFill>
+                  <a:srgbClr val="ABB2BF"/>
+                </a:solidFill>
+                <a:effectLst/>
+                <a:latin typeface="D2Coding ligature" panose="020B0609020101020101" pitchFamily="49" charset="-127"/>
+                <a:ea typeface="D2Coding ligature" panose="020B0609020101020101" pitchFamily="49" charset="-127"/>
+              </a:rPr>
+              <a:t>}</a:t>
+            </a:r>
+          </a:p>
+          <a:p>
+            <a:pPr>
+              <a:lnSpc>
+                <a:spcPts val="1650"/>
+              </a:lnSpc>
+              <a:buNone/>
+            </a:pPr>
+            <a:br>
+              <a:rPr lang="en-US" altLang="ko-KR" sz="1400" b="0" dirty="0">
+                <a:solidFill>
+                  <a:srgbClr val="ABB2BF"/>
+                </a:solidFill>
+                <a:effectLst/>
+                <a:latin typeface="D2Coding ligature" panose="020B0609020101020101" pitchFamily="49" charset="-127"/>
+                <a:ea typeface="D2Coding ligature" panose="020B0609020101020101" pitchFamily="49" charset="-127"/>
+              </a:rPr>
+            </a:br>
+            <a:endParaRPr lang="en-US" altLang="ko-KR" sz="1400" b="0" dirty="0">
+              <a:solidFill>
+                <a:srgbClr val="ABB2BF"/>
+              </a:solidFill>
+              <a:effectLst/>
+              <a:latin typeface="D2Coding ligature" panose="020B0609020101020101" pitchFamily="49" charset="-127"/>
+              <a:ea typeface="D2Coding ligature" panose="020B0609020101020101" pitchFamily="49" charset="-127"/>
+            </a:endParaRPr>
+          </a:p>
+          <a:p>
+            <a:pPr>
+              <a:lnSpc>
+                <a:spcPts val="1650"/>
+              </a:lnSpc>
+              <a:buNone/>
+            </a:pPr>
+            <a:r>
+              <a:rPr lang="en-US" altLang="ko-KR" sz="1400" b="0" dirty="0">
+                <a:solidFill>
+                  <a:srgbClr val="D19A66"/>
+                </a:solidFill>
+                <a:effectLst/>
+                <a:latin typeface="D2Coding ligature" panose="020B0609020101020101" pitchFamily="49" charset="-127"/>
+                <a:ea typeface="D2Coding ligature" panose="020B0609020101020101" pitchFamily="49" charset="-127"/>
+              </a:rPr>
+              <a:t>.swiper-slide</a:t>
+            </a:r>
+            <a:r>
+              <a:rPr lang="en-US" altLang="ko-KR" sz="1400" b="0" dirty="0">
+                <a:solidFill>
+                  <a:srgbClr val="ABB2BF"/>
+                </a:solidFill>
+                <a:effectLst/>
+                <a:latin typeface="D2Coding ligature" panose="020B0609020101020101" pitchFamily="49" charset="-127"/>
+                <a:ea typeface="D2Coding ligature" panose="020B0609020101020101" pitchFamily="49" charset="-127"/>
+              </a:rPr>
+              <a:t> {</a:t>
+            </a:r>
+          </a:p>
+          <a:p>
+            <a:pPr>
+              <a:lnSpc>
+                <a:spcPts val="1650"/>
+              </a:lnSpc>
+              <a:buNone/>
+            </a:pPr>
+            <a:r>
+              <a:rPr lang="en-US" altLang="ko-KR" sz="1400" b="0" dirty="0">
+                <a:solidFill>
+                  <a:srgbClr val="ABB2BF"/>
+                </a:solidFill>
+                <a:effectLst/>
+                <a:latin typeface="D2Coding ligature" panose="020B0609020101020101" pitchFamily="49" charset="-127"/>
+                <a:ea typeface="D2Coding ligature" panose="020B0609020101020101" pitchFamily="49" charset="-127"/>
+              </a:rPr>
+              <a:t>  display: </a:t>
+            </a:r>
+            <a:r>
+              <a:rPr lang="en-US" altLang="ko-KR" sz="1400" b="0" dirty="0">
+                <a:solidFill>
+                  <a:srgbClr val="D19A66"/>
+                </a:solidFill>
+                <a:effectLst/>
+                <a:latin typeface="D2Coding ligature" panose="020B0609020101020101" pitchFamily="49" charset="-127"/>
+                <a:ea typeface="D2Coding ligature" panose="020B0609020101020101" pitchFamily="49" charset="-127"/>
+              </a:rPr>
+              <a:t>flex</a:t>
+            </a:r>
+            <a:r>
+              <a:rPr lang="en-US" altLang="ko-KR" sz="1400" b="0" dirty="0">
+                <a:solidFill>
+                  <a:srgbClr val="ABB2BF"/>
+                </a:solidFill>
+                <a:effectLst/>
+                <a:latin typeface="D2Coding ligature" panose="020B0609020101020101" pitchFamily="49" charset="-127"/>
+                <a:ea typeface="D2Coding ligature" panose="020B0609020101020101" pitchFamily="49" charset="-127"/>
+              </a:rPr>
+              <a:t>;</a:t>
+            </a:r>
+          </a:p>
+          <a:p>
+            <a:pPr>
+              <a:lnSpc>
+                <a:spcPts val="1650"/>
+              </a:lnSpc>
+              <a:buNone/>
+            </a:pPr>
+            <a:r>
+              <a:rPr lang="en-US" altLang="ko-KR" sz="1400" b="0" dirty="0">
+                <a:solidFill>
+                  <a:srgbClr val="ABB2BF"/>
+                </a:solidFill>
+                <a:effectLst/>
+                <a:latin typeface="D2Coding ligature" panose="020B0609020101020101" pitchFamily="49" charset="-127"/>
+                <a:ea typeface="D2Coding ligature" panose="020B0609020101020101" pitchFamily="49" charset="-127"/>
+              </a:rPr>
+              <a:t>  flex-direction: </a:t>
+            </a:r>
+            <a:r>
+              <a:rPr lang="en-US" altLang="ko-KR" sz="1400" b="0" dirty="0">
+                <a:solidFill>
+                  <a:srgbClr val="D19A66"/>
+                </a:solidFill>
+                <a:effectLst/>
+                <a:latin typeface="D2Coding ligature" panose="020B0609020101020101" pitchFamily="49" charset="-127"/>
+                <a:ea typeface="D2Coding ligature" panose="020B0609020101020101" pitchFamily="49" charset="-127"/>
+              </a:rPr>
+              <a:t>column</a:t>
+            </a:r>
+            <a:r>
+              <a:rPr lang="en-US" altLang="ko-KR" sz="1400" b="0" dirty="0">
+                <a:solidFill>
+                  <a:srgbClr val="ABB2BF"/>
+                </a:solidFill>
+                <a:effectLst/>
+                <a:latin typeface="D2Coding ligature" panose="020B0609020101020101" pitchFamily="49" charset="-127"/>
+                <a:ea typeface="D2Coding ligature" panose="020B0609020101020101" pitchFamily="49" charset="-127"/>
+              </a:rPr>
+              <a:t>;</a:t>
+            </a:r>
+          </a:p>
+          <a:p>
+            <a:pPr>
+              <a:lnSpc>
+                <a:spcPts val="1650"/>
+              </a:lnSpc>
+              <a:buNone/>
+            </a:pPr>
+            <a:r>
+              <a:rPr lang="en-US" altLang="ko-KR" sz="1400" b="0" dirty="0">
+                <a:solidFill>
+                  <a:srgbClr val="ABB2BF"/>
+                </a:solidFill>
+                <a:effectLst/>
+                <a:latin typeface="D2Coding ligature" panose="020B0609020101020101" pitchFamily="49" charset="-127"/>
+                <a:ea typeface="D2Coding ligature" panose="020B0609020101020101" pitchFamily="49" charset="-127"/>
+              </a:rPr>
+              <a:t>  font-size: </a:t>
+            </a:r>
+            <a:r>
+              <a:rPr lang="en-US" altLang="ko-KR" sz="1400" b="0" dirty="0">
+                <a:solidFill>
+                  <a:srgbClr val="D19A66"/>
+                </a:solidFill>
+                <a:effectLst/>
+                <a:latin typeface="D2Coding ligature" panose="020B0609020101020101" pitchFamily="49" charset="-127"/>
+                <a:ea typeface="D2Coding ligature" panose="020B0609020101020101" pitchFamily="49" charset="-127"/>
+              </a:rPr>
+              <a:t>12</a:t>
+            </a:r>
+            <a:r>
+              <a:rPr lang="en-US" altLang="ko-KR" sz="1400" b="0" dirty="0">
+                <a:solidFill>
+                  <a:srgbClr val="E06C75"/>
+                </a:solidFill>
+                <a:effectLst/>
+                <a:latin typeface="D2Coding ligature" panose="020B0609020101020101" pitchFamily="49" charset="-127"/>
+                <a:ea typeface="D2Coding ligature" panose="020B0609020101020101" pitchFamily="49" charset="-127"/>
+              </a:rPr>
+              <a:t>px</a:t>
+            </a:r>
+            <a:r>
+              <a:rPr lang="en-US" altLang="ko-KR" sz="1400" b="0" dirty="0">
+                <a:solidFill>
+                  <a:srgbClr val="ABB2BF"/>
+                </a:solidFill>
+                <a:effectLst/>
+                <a:latin typeface="D2Coding ligature" panose="020B0609020101020101" pitchFamily="49" charset="-127"/>
+                <a:ea typeface="D2Coding ligature" panose="020B0609020101020101" pitchFamily="49" charset="-127"/>
+              </a:rPr>
+              <a:t>;</a:t>
+            </a:r>
+          </a:p>
+          <a:p>
+            <a:pPr>
+              <a:lnSpc>
+                <a:spcPts val="1650"/>
+              </a:lnSpc>
+              <a:buNone/>
+            </a:pPr>
+            <a:r>
+              <a:rPr lang="en-US" altLang="ko-KR" sz="1400" b="0" dirty="0">
+                <a:solidFill>
+                  <a:srgbClr val="ABB2BF"/>
+                </a:solidFill>
+                <a:effectLst/>
+                <a:latin typeface="D2Coding ligature" panose="020B0609020101020101" pitchFamily="49" charset="-127"/>
+                <a:ea typeface="D2Coding ligature" panose="020B0609020101020101" pitchFamily="49" charset="-127"/>
+              </a:rPr>
+              <a:t>}</a:t>
+            </a:r>
+          </a:p>
+          <a:p>
+            <a:pPr>
+              <a:lnSpc>
+                <a:spcPts val="1650"/>
+              </a:lnSpc>
+              <a:buNone/>
+            </a:pPr>
+            <a:br>
+              <a:rPr lang="en-US" altLang="ko-KR" sz="1400" b="0" dirty="0">
+                <a:solidFill>
+                  <a:srgbClr val="ABB2BF"/>
+                </a:solidFill>
+                <a:effectLst/>
+                <a:latin typeface="D2Coding ligature" panose="020B0609020101020101" pitchFamily="49" charset="-127"/>
+                <a:ea typeface="D2Coding ligature" panose="020B0609020101020101" pitchFamily="49" charset="-127"/>
+              </a:rPr>
+            </a:br>
+            <a:endParaRPr lang="en-US" altLang="ko-KR" sz="1400" b="0" dirty="0">
+              <a:solidFill>
+                <a:srgbClr val="ABB2BF"/>
+              </a:solidFill>
+              <a:effectLst/>
+              <a:latin typeface="D2Coding ligature" panose="020B0609020101020101" pitchFamily="49" charset="-127"/>
+              <a:ea typeface="D2Coding ligature" panose="020B0609020101020101" pitchFamily="49" charset="-127"/>
+            </a:endParaRPr>
+          </a:p>
+          <a:p>
+            <a:pPr>
+              <a:lnSpc>
+                <a:spcPts val="1650"/>
+              </a:lnSpc>
+              <a:buNone/>
+            </a:pPr>
+            <a:r>
+              <a:rPr lang="en-US" altLang="ko-KR" sz="1400" b="0" dirty="0">
+                <a:solidFill>
+                  <a:srgbClr val="D19A66"/>
+                </a:solidFill>
+                <a:effectLst/>
+                <a:latin typeface="D2Coding ligature" panose="020B0609020101020101" pitchFamily="49" charset="-127"/>
+                <a:ea typeface="D2Coding ligature" panose="020B0609020101020101" pitchFamily="49" charset="-127"/>
+              </a:rPr>
+              <a:t>.swiper-slide</a:t>
+            </a:r>
+            <a:r>
+              <a:rPr lang="en-US" altLang="ko-KR" sz="1400" b="0" dirty="0">
+                <a:solidFill>
+                  <a:srgbClr val="C678DD"/>
+                </a:solidFill>
+                <a:effectLst/>
+                <a:latin typeface="D2Coding ligature" panose="020B0609020101020101" pitchFamily="49" charset="-127"/>
+                <a:ea typeface="D2Coding ligature" panose="020B0609020101020101" pitchFamily="49" charset="-127"/>
+              </a:rPr>
+              <a:t> </a:t>
+            </a:r>
+            <a:r>
+              <a:rPr lang="en-US" altLang="ko-KR" sz="1400" b="0" dirty="0" err="1">
+                <a:solidFill>
+                  <a:srgbClr val="E06C75"/>
+                </a:solidFill>
+                <a:effectLst/>
+                <a:latin typeface="D2Coding ligature" panose="020B0609020101020101" pitchFamily="49" charset="-127"/>
+                <a:ea typeface="D2Coding ligature" panose="020B0609020101020101" pitchFamily="49" charset="-127"/>
+              </a:rPr>
+              <a:t>img</a:t>
+            </a:r>
+            <a:r>
+              <a:rPr lang="en-US" altLang="ko-KR" sz="1400" b="0" dirty="0">
+                <a:solidFill>
+                  <a:srgbClr val="ABB2BF"/>
+                </a:solidFill>
+                <a:effectLst/>
+                <a:latin typeface="D2Coding ligature" panose="020B0609020101020101" pitchFamily="49" charset="-127"/>
+                <a:ea typeface="D2Coding ligature" panose="020B0609020101020101" pitchFamily="49" charset="-127"/>
+              </a:rPr>
+              <a:t> {</a:t>
+            </a:r>
+          </a:p>
+          <a:p>
+            <a:pPr>
+              <a:lnSpc>
+                <a:spcPts val="1650"/>
+              </a:lnSpc>
+              <a:buNone/>
+            </a:pPr>
+            <a:r>
+              <a:rPr lang="en-US" altLang="ko-KR" sz="1400" b="0" dirty="0">
+                <a:solidFill>
+                  <a:srgbClr val="ABB2BF"/>
+                </a:solidFill>
+                <a:effectLst/>
+                <a:latin typeface="D2Coding ligature" panose="020B0609020101020101" pitchFamily="49" charset="-127"/>
+                <a:ea typeface="D2Coding ligature" panose="020B0609020101020101" pitchFamily="49" charset="-127"/>
+              </a:rPr>
+              <a:t>  width: </a:t>
+            </a:r>
+            <a:r>
+              <a:rPr lang="en-US" altLang="ko-KR" sz="1400" b="0" dirty="0">
+                <a:solidFill>
+                  <a:srgbClr val="D19A66"/>
+                </a:solidFill>
+                <a:effectLst/>
+                <a:latin typeface="D2Coding ligature" panose="020B0609020101020101" pitchFamily="49" charset="-127"/>
+                <a:ea typeface="D2Coding ligature" panose="020B0609020101020101" pitchFamily="49" charset="-127"/>
+              </a:rPr>
+              <a:t>100</a:t>
+            </a:r>
+            <a:r>
+              <a:rPr lang="en-US" altLang="ko-KR" sz="1400" b="0" dirty="0">
+                <a:solidFill>
+                  <a:srgbClr val="E06C75"/>
+                </a:solidFill>
+                <a:effectLst/>
+                <a:latin typeface="D2Coding ligature" panose="020B0609020101020101" pitchFamily="49" charset="-127"/>
+                <a:ea typeface="D2Coding ligature" panose="020B0609020101020101" pitchFamily="49" charset="-127"/>
+              </a:rPr>
+              <a:t>%</a:t>
+            </a:r>
+            <a:r>
+              <a:rPr lang="en-US" altLang="ko-KR" sz="1400" b="0" dirty="0">
+                <a:solidFill>
+                  <a:srgbClr val="ABB2BF"/>
+                </a:solidFill>
+                <a:effectLst/>
+                <a:latin typeface="D2Coding ligature" panose="020B0609020101020101" pitchFamily="49" charset="-127"/>
+                <a:ea typeface="D2Coding ligature" panose="020B0609020101020101" pitchFamily="49" charset="-127"/>
+              </a:rPr>
+              <a:t>;</a:t>
+            </a:r>
+          </a:p>
+          <a:p>
+            <a:pPr>
+              <a:lnSpc>
+                <a:spcPts val="1650"/>
+              </a:lnSpc>
+              <a:buNone/>
+            </a:pPr>
+            <a:r>
+              <a:rPr lang="en-US" altLang="ko-KR" sz="1400" b="0" dirty="0">
+                <a:solidFill>
+                  <a:srgbClr val="ABB2BF"/>
+                </a:solidFill>
+                <a:effectLst/>
+                <a:latin typeface="D2Coding ligature" panose="020B0609020101020101" pitchFamily="49" charset="-127"/>
+                <a:ea typeface="D2Coding ligature" panose="020B0609020101020101" pitchFamily="49" charset="-127"/>
+              </a:rPr>
+              <a:t>  height: </a:t>
+            </a:r>
+            <a:r>
+              <a:rPr lang="en-US" altLang="ko-KR" sz="1400" b="0" dirty="0">
+                <a:solidFill>
+                  <a:srgbClr val="D19A66"/>
+                </a:solidFill>
+                <a:effectLst/>
+                <a:latin typeface="D2Coding ligature" panose="020B0609020101020101" pitchFamily="49" charset="-127"/>
+                <a:ea typeface="D2Coding ligature" panose="020B0609020101020101" pitchFamily="49" charset="-127"/>
+              </a:rPr>
+              <a:t>auto</a:t>
+            </a:r>
+            <a:r>
+              <a:rPr lang="en-US" altLang="ko-KR" sz="1400" b="0" dirty="0">
+                <a:solidFill>
+                  <a:srgbClr val="ABB2BF"/>
+                </a:solidFill>
+                <a:effectLst/>
+                <a:latin typeface="D2Coding ligature" panose="020B0609020101020101" pitchFamily="49" charset="-127"/>
+                <a:ea typeface="D2Coding ligature" panose="020B0609020101020101" pitchFamily="49" charset="-127"/>
+              </a:rPr>
+              <a:t>;</a:t>
+            </a:r>
+          </a:p>
+          <a:p>
+            <a:pPr>
+              <a:lnSpc>
+                <a:spcPts val="1650"/>
+              </a:lnSpc>
+              <a:buNone/>
+            </a:pPr>
+            <a:r>
+              <a:rPr lang="en-US" altLang="ko-KR" sz="1400" b="0" dirty="0">
+                <a:solidFill>
+                  <a:srgbClr val="ABB2BF"/>
+                </a:solidFill>
+                <a:effectLst/>
+                <a:latin typeface="D2Coding ligature" panose="020B0609020101020101" pitchFamily="49" charset="-127"/>
+                <a:ea typeface="D2Coding ligature" panose="020B0609020101020101" pitchFamily="49" charset="-127"/>
+              </a:rPr>
+              <a:t>  margin-bottom: </a:t>
+            </a:r>
+            <a:r>
+              <a:rPr lang="en-US" altLang="ko-KR" sz="1400" b="0" dirty="0">
+                <a:solidFill>
+                  <a:srgbClr val="D19A66"/>
+                </a:solidFill>
+                <a:effectLst/>
+                <a:latin typeface="D2Coding ligature" panose="020B0609020101020101" pitchFamily="49" charset="-127"/>
+                <a:ea typeface="D2Coding ligature" panose="020B0609020101020101" pitchFamily="49" charset="-127"/>
+              </a:rPr>
+              <a:t>10</a:t>
+            </a:r>
+            <a:r>
+              <a:rPr lang="en-US" altLang="ko-KR" sz="1400" b="0" dirty="0">
+                <a:solidFill>
+                  <a:srgbClr val="E06C75"/>
+                </a:solidFill>
+                <a:effectLst/>
+                <a:latin typeface="D2Coding ligature" panose="020B0609020101020101" pitchFamily="49" charset="-127"/>
+                <a:ea typeface="D2Coding ligature" panose="020B0609020101020101" pitchFamily="49" charset="-127"/>
+              </a:rPr>
+              <a:t>px</a:t>
+            </a:r>
+            <a:r>
+              <a:rPr lang="en-US" altLang="ko-KR" sz="1400" b="0" dirty="0">
+                <a:solidFill>
+                  <a:srgbClr val="ABB2BF"/>
+                </a:solidFill>
+                <a:effectLst/>
+                <a:latin typeface="D2Coding ligature" panose="020B0609020101020101" pitchFamily="49" charset="-127"/>
+                <a:ea typeface="D2Coding ligature" panose="020B0609020101020101" pitchFamily="49" charset="-127"/>
+              </a:rPr>
+              <a:t>;</a:t>
+            </a:r>
+          </a:p>
+          <a:p>
+            <a:pPr>
+              <a:lnSpc>
+                <a:spcPts val="1650"/>
+              </a:lnSpc>
+              <a:buNone/>
+            </a:pPr>
+            <a:r>
+              <a:rPr lang="en-US" altLang="ko-KR" sz="1400" b="0" dirty="0">
+                <a:solidFill>
+                  <a:srgbClr val="ABB2BF"/>
+                </a:solidFill>
+                <a:effectLst/>
+                <a:latin typeface="D2Coding ligature" panose="020B0609020101020101" pitchFamily="49" charset="-127"/>
+                <a:ea typeface="D2Coding ligature" panose="020B0609020101020101" pitchFamily="49" charset="-127"/>
+              </a:rPr>
+              <a:t>}</a:t>
+            </a:r>
+          </a:p>
+          <a:p>
+            <a:pPr>
+              <a:lnSpc>
+                <a:spcPts val="1650"/>
+              </a:lnSpc>
+              <a:buNone/>
+            </a:pPr>
+            <a:r>
+              <a:rPr lang="en-US" altLang="ko-KR" sz="1400" b="0" dirty="0">
+                <a:solidFill>
+                  <a:srgbClr val="D19A66"/>
+                </a:solidFill>
+                <a:effectLst/>
+                <a:latin typeface="D2Coding ligature" panose="020B0609020101020101" pitchFamily="49" charset="-127"/>
+                <a:ea typeface="D2Coding ligature" panose="020B0609020101020101" pitchFamily="49" charset="-127"/>
+              </a:rPr>
+              <a:t>.</a:t>
+            </a:r>
+            <a:r>
+              <a:rPr lang="en-US" altLang="ko-KR" sz="1400" b="0" dirty="0" err="1">
+                <a:solidFill>
+                  <a:srgbClr val="D19A66"/>
+                </a:solidFill>
+                <a:effectLst/>
+                <a:latin typeface="D2Coding ligature" panose="020B0609020101020101" pitchFamily="49" charset="-127"/>
+                <a:ea typeface="D2Coding ligature" panose="020B0609020101020101" pitchFamily="49" charset="-127"/>
+              </a:rPr>
+              <a:t>swiper-button-next</a:t>
+            </a:r>
+            <a:r>
+              <a:rPr lang="en-US" altLang="ko-KR" sz="1400" b="0" dirty="0" err="1">
+                <a:solidFill>
+                  <a:srgbClr val="56B6C2"/>
+                </a:solidFill>
+                <a:effectLst/>
+                <a:latin typeface="D2Coding ligature" panose="020B0609020101020101" pitchFamily="49" charset="-127"/>
+                <a:ea typeface="D2Coding ligature" panose="020B0609020101020101" pitchFamily="49" charset="-127"/>
+              </a:rPr>
+              <a:t>:after</a:t>
+            </a:r>
+            <a:r>
+              <a:rPr lang="en-US" altLang="ko-KR" sz="1400" b="0" dirty="0">
+                <a:solidFill>
+                  <a:srgbClr val="ABB2BF"/>
+                </a:solidFill>
+                <a:effectLst/>
+                <a:latin typeface="D2Coding ligature" panose="020B0609020101020101" pitchFamily="49" charset="-127"/>
+                <a:ea typeface="D2Coding ligature" panose="020B0609020101020101" pitchFamily="49" charset="-127"/>
+              </a:rPr>
+              <a:t>,</a:t>
+            </a:r>
+          </a:p>
+          <a:p>
+            <a:pPr>
+              <a:lnSpc>
+                <a:spcPts val="1650"/>
+              </a:lnSpc>
+              <a:buNone/>
+            </a:pPr>
+            <a:r>
+              <a:rPr lang="en-US" altLang="ko-KR" sz="1400" b="0" dirty="0">
+                <a:solidFill>
+                  <a:srgbClr val="D19A66"/>
+                </a:solidFill>
+                <a:effectLst/>
+                <a:latin typeface="D2Coding ligature" panose="020B0609020101020101" pitchFamily="49" charset="-127"/>
+                <a:ea typeface="D2Coding ligature" panose="020B0609020101020101" pitchFamily="49" charset="-127"/>
+              </a:rPr>
+              <a:t>.</a:t>
+            </a:r>
+            <a:r>
+              <a:rPr lang="en-US" altLang="ko-KR" sz="1400" b="0" dirty="0" err="1">
+                <a:solidFill>
+                  <a:srgbClr val="D19A66"/>
+                </a:solidFill>
+                <a:effectLst/>
+                <a:latin typeface="D2Coding ligature" panose="020B0609020101020101" pitchFamily="49" charset="-127"/>
+                <a:ea typeface="D2Coding ligature" panose="020B0609020101020101" pitchFamily="49" charset="-127"/>
+              </a:rPr>
+              <a:t>swiper-button-prev</a:t>
+            </a:r>
+            <a:r>
+              <a:rPr lang="en-US" altLang="ko-KR" sz="1400" b="0" dirty="0" err="1">
+                <a:solidFill>
+                  <a:srgbClr val="56B6C2"/>
+                </a:solidFill>
+                <a:effectLst/>
+                <a:latin typeface="D2Coding ligature" panose="020B0609020101020101" pitchFamily="49" charset="-127"/>
+                <a:ea typeface="D2Coding ligature" panose="020B0609020101020101" pitchFamily="49" charset="-127"/>
+              </a:rPr>
+              <a:t>:after</a:t>
+            </a:r>
+            <a:r>
+              <a:rPr lang="en-US" altLang="ko-KR" sz="1400" b="0" dirty="0">
+                <a:solidFill>
+                  <a:srgbClr val="ABB2BF"/>
+                </a:solidFill>
+                <a:effectLst/>
+                <a:latin typeface="D2Coding ligature" panose="020B0609020101020101" pitchFamily="49" charset="-127"/>
+                <a:ea typeface="D2Coding ligature" panose="020B0609020101020101" pitchFamily="49" charset="-127"/>
+              </a:rPr>
+              <a:t> {</a:t>
+            </a:r>
+          </a:p>
+          <a:p>
+            <a:pPr>
+              <a:lnSpc>
+                <a:spcPts val="1650"/>
+              </a:lnSpc>
+              <a:buNone/>
+            </a:pPr>
+            <a:r>
+              <a:rPr lang="en-US" altLang="ko-KR" sz="1400" b="0" dirty="0">
+                <a:solidFill>
+                  <a:srgbClr val="ABB2BF"/>
+                </a:solidFill>
+                <a:effectLst/>
+                <a:latin typeface="D2Coding ligature" panose="020B0609020101020101" pitchFamily="49" charset="-127"/>
+                <a:ea typeface="D2Coding ligature" panose="020B0609020101020101" pitchFamily="49" charset="-127"/>
+              </a:rPr>
+              <a:t>  font-weight: </a:t>
+            </a:r>
+            <a:r>
+              <a:rPr lang="en-US" altLang="ko-KR" sz="1400" b="0" dirty="0">
+                <a:solidFill>
+                  <a:srgbClr val="D19A66"/>
+                </a:solidFill>
+                <a:effectLst/>
+                <a:latin typeface="D2Coding ligature" panose="020B0609020101020101" pitchFamily="49" charset="-127"/>
+                <a:ea typeface="D2Coding ligature" panose="020B0609020101020101" pitchFamily="49" charset="-127"/>
+              </a:rPr>
+              <a:t>900</a:t>
+            </a:r>
+            <a:r>
+              <a:rPr lang="en-US" altLang="ko-KR" sz="1400" b="0" dirty="0">
+                <a:solidFill>
+                  <a:srgbClr val="ABB2BF"/>
+                </a:solidFill>
+                <a:effectLst/>
+                <a:latin typeface="D2Coding ligature" panose="020B0609020101020101" pitchFamily="49" charset="-127"/>
+                <a:ea typeface="D2Coding ligature" panose="020B0609020101020101" pitchFamily="49" charset="-127"/>
+              </a:rPr>
+              <a:t>;</a:t>
+            </a:r>
+          </a:p>
+          <a:p>
+            <a:pPr>
+              <a:lnSpc>
+                <a:spcPts val="1650"/>
+              </a:lnSpc>
+              <a:buNone/>
+            </a:pPr>
+            <a:r>
+              <a:rPr lang="en-US" altLang="ko-KR" sz="1400" b="0" dirty="0">
+                <a:solidFill>
+                  <a:srgbClr val="ABB2BF"/>
+                </a:solidFill>
+                <a:effectLst/>
+                <a:latin typeface="D2Coding ligature" panose="020B0609020101020101" pitchFamily="49" charset="-127"/>
+                <a:ea typeface="D2Coding ligature" panose="020B0609020101020101" pitchFamily="49" charset="-127"/>
+              </a:rPr>
+              <a:t>}</a:t>
+            </a:r>
+          </a:p>
+        </p:txBody>
+      </p:sp>
+    </p:spTree>
+    <p:extLst>
+      <p:ext uri="{BB962C8B-B14F-4D97-AF65-F5344CB8AC3E}">
+        <p14:creationId xmlns:p14="http://schemas.microsoft.com/office/powerpoint/2010/main" val="3267060768"/>
+      </p:ext>
+    </p:extLst>
+  </p:cSld>
+  <p:clrMapOvr>
+    <a:masterClrMapping/>
+  </p:clrMapOvr>
+</p:sld>
+</file>
+
+<file path=ppt/slides/slide5.xml><?xml version="1.0" encoding="utf-8"?>
+<p:sld xmlns:a="http://schemas.openxmlformats.org/drawingml/2006/main" xmlns:r="http://schemas.openxmlformats.org/officeDocument/2006/relationships" xmlns:p="http://schemas.openxmlformats.org/presentationml/2006/main">
+  <p:cSld>
+    <p:bg>
+      <p:bgPr>
+        <a:solidFill>
+          <a:srgbClr val="0B0C17"/>
+        </a:solidFill>
+        <a:effectLst/>
+      </p:bgPr>
+    </p:bg>
+    <p:spTree>
+      <p:nvGrpSpPr>
+        <p:cNvPr id="1" name="">
+          <a:extLst>
+            <a:ext uri="{FF2B5EF4-FFF2-40B4-BE49-F238E27FC236}">
               <a16:creationId xmlns:a16="http://schemas.microsoft.com/office/drawing/2014/main" id="{CAAEB48A-990E-70C0-CC0C-8BA7AE7B28CE}"/>
             </a:ext>
           </a:extLst>
@@ -10529,7 +13299,7 @@
 </p:sld>
 </file>
 
-<file path=ppt/slides/slide5.xml><?xml version="1.0" encoding="utf-8"?>
+<file path=ppt/slides/slide6.xml><?xml version="1.0" encoding="utf-8"?>
 <p:sld xmlns:a="http://schemas.openxmlformats.org/drawingml/2006/main" xmlns:r="http://schemas.openxmlformats.org/officeDocument/2006/relationships" xmlns:p="http://schemas.openxmlformats.org/presentationml/2006/main">
   <p:cSld>
     <p:bg>
@@ -12529,7 +15299,7 @@
 </p:sld>
 </file>
 
-<file path=ppt/slides/slide6.xml><?xml version="1.0" encoding="utf-8"?>
+<file path=ppt/slides/slide7.xml><?xml version="1.0" encoding="utf-8"?>
 <p:sld xmlns:a="http://schemas.openxmlformats.org/drawingml/2006/main" xmlns:r="http://schemas.openxmlformats.org/officeDocument/2006/relationships" xmlns:p="http://schemas.openxmlformats.org/presentationml/2006/main">
   <p:cSld>
     <p:bg>
@@ -12894,7 +15664,7 @@
 </p:sld>
 </file>
 
-<file path=ppt/slides/slide7.xml><?xml version="1.0" encoding="utf-8"?>
+<file path=ppt/slides/slide8.xml><?xml version="1.0" encoding="utf-8"?>
 <p:sld xmlns:a="http://schemas.openxmlformats.org/drawingml/2006/main" xmlns:r="http://schemas.openxmlformats.org/officeDocument/2006/relationships" xmlns:p="http://schemas.openxmlformats.org/presentationml/2006/main">
   <p:cSld>
     <p:bg>
@@ -14712,7 +17482,7 @@
 </p:sld>
 </file>
 
-<file path=ppt/slides/slide8.xml><?xml version="1.0" encoding="utf-8"?>
+<file path=ppt/slides/slide9.xml><?xml version="1.0" encoding="utf-8"?>
 <p:sld xmlns:a="http://schemas.openxmlformats.org/drawingml/2006/main" xmlns:r="http://schemas.openxmlformats.org/officeDocument/2006/relationships" xmlns:p="http://schemas.openxmlformats.org/presentationml/2006/main">
   <p:cSld>
     <p:bg>
@@ -16299,1477 +19069,6 @@
     <p:extLst>
       <p:ext uri="{BB962C8B-B14F-4D97-AF65-F5344CB8AC3E}">
         <p14:creationId xmlns:p14="http://schemas.microsoft.com/office/powerpoint/2010/main" val="2680472094"/>
-      </p:ext>
-    </p:extLst>
-  </p:cSld>
-  <p:clrMapOvr>
-    <a:masterClrMapping/>
-  </p:clrMapOvr>
-</p:sld>
-</file>
-
-<file path=ppt/slides/slide9.xml><?xml version="1.0" encoding="utf-8"?>
-<p:sld xmlns:a="http://schemas.openxmlformats.org/drawingml/2006/main" xmlns:r="http://schemas.openxmlformats.org/officeDocument/2006/relationships" xmlns:p="http://schemas.openxmlformats.org/presentationml/2006/main">
-  <p:cSld>
-    <p:bg>
-      <p:bgPr>
-        <a:solidFill>
-          <a:srgbClr val="0B0C17"/>
-        </a:solidFill>
-        <a:effectLst/>
-      </p:bgPr>
-    </p:bg>
-    <p:spTree>
-      <p:nvGrpSpPr>
-        <p:cNvPr id="1" name="">
-          <a:extLst>
-            <a:ext uri="{FF2B5EF4-FFF2-40B4-BE49-F238E27FC236}">
-              <a16:creationId xmlns:a16="http://schemas.microsoft.com/office/drawing/2014/main" id="{0036CBCD-7B58-7C3D-FCC0-A88B3544A6A8}"/>
-            </a:ext>
-          </a:extLst>
-        </p:cNvPr>
-        <p:cNvGrpSpPr/>
-        <p:nvPr/>
-      </p:nvGrpSpPr>
-      <p:grpSpPr>
-        <a:xfrm>
-          <a:off x="0" y="0"/>
-          <a:ext cx="0" cy="0"/>
-          <a:chOff x="0" y="0"/>
-          <a:chExt cx="0" cy="0"/>
-        </a:xfrm>
-      </p:grpSpPr>
-      <p:pic>
-        <p:nvPicPr>
-          <p:cNvPr id="5" name="그림 4" descr="텍스트, 스크린샷, 소프트웨어, 멀티미디어 소프트웨어이(가) 표시된 사진&#10;&#10;AI 생성 콘텐츠는 정확하지 않을 수 있습니다.">
-            <a:extLst>
-              <a:ext uri="{FF2B5EF4-FFF2-40B4-BE49-F238E27FC236}">
-                <a16:creationId xmlns:a16="http://schemas.microsoft.com/office/drawing/2014/main" id="{1D38BDBA-FE03-E406-D651-6369B8F5C404}"/>
-              </a:ext>
-            </a:extLst>
-          </p:cNvPr>
-          <p:cNvPicPr>
-            <a:picLocks noChangeAspect="1"/>
-          </p:cNvPicPr>
-          <p:nvPr/>
-        </p:nvPicPr>
-        <p:blipFill>
-          <a:blip r:embed="rId2"/>
-          <a:srcRect l="13004" r="12123"/>
-          <a:stretch>
-            <a:fillRect/>
-          </a:stretch>
-        </p:blipFill>
-        <p:spPr>
-          <a:xfrm>
-            <a:off x="0" y="1673772"/>
-            <a:ext cx="7609722" cy="5025715"/>
-          </a:xfrm>
-          <a:prstGeom prst="rect">
-            <a:avLst/>
-          </a:prstGeom>
-        </p:spPr>
-      </p:pic>
-      <p:sp>
-        <p:nvSpPr>
-          <p:cNvPr id="8" name="TextBox 7">
-            <a:extLst>
-              <a:ext uri="{FF2B5EF4-FFF2-40B4-BE49-F238E27FC236}">
-                <a16:creationId xmlns:a16="http://schemas.microsoft.com/office/drawing/2014/main" id="{835BF572-A87F-7B5A-70A6-5745B60E0CFE}"/>
-              </a:ext>
-            </a:extLst>
-          </p:cNvPr>
-          <p:cNvSpPr txBox="1"/>
-          <p:nvPr/>
-        </p:nvSpPr>
-        <p:spPr>
-          <a:xfrm>
-            <a:off x="163201" y="158513"/>
-            <a:ext cx="2832247" cy="461665"/>
-          </a:xfrm>
-          <a:prstGeom prst="rect">
-            <a:avLst/>
-          </a:prstGeom>
-          <a:noFill/>
-        </p:spPr>
-        <p:txBody>
-          <a:bodyPr wrap="square" rtlCol="0">
-            <a:spAutoFit/>
-          </a:bodyPr>
-          <a:lstStyle/>
-          <a:p>
-            <a:r>
-              <a:rPr lang="en-US" altLang="ko-KR" sz="2400" dirty="0">
-                <a:solidFill>
-                  <a:schemeClr val="bg1"/>
-                </a:solidFill>
-              </a:rPr>
-              <a:t>detail.html</a:t>
-            </a:r>
-            <a:endParaRPr lang="ko-KR" altLang="en-US" sz="2400" dirty="0">
-              <a:solidFill>
-                <a:schemeClr val="bg1"/>
-              </a:solidFill>
-            </a:endParaRPr>
-          </a:p>
-        </p:txBody>
-      </p:sp>
-      <p:sp>
-        <p:nvSpPr>
-          <p:cNvPr id="2" name="TextBox 1">
-            <a:extLst>
-              <a:ext uri="{FF2B5EF4-FFF2-40B4-BE49-F238E27FC236}">
-                <a16:creationId xmlns:a16="http://schemas.microsoft.com/office/drawing/2014/main" id="{A326FDC0-720C-9F41-39C5-F9853E93C30B}"/>
-              </a:ext>
-            </a:extLst>
-          </p:cNvPr>
-          <p:cNvSpPr txBox="1"/>
-          <p:nvPr/>
-        </p:nvSpPr>
-        <p:spPr>
-          <a:xfrm>
-            <a:off x="1962951" y="165886"/>
-            <a:ext cx="2064993" cy="454292"/>
-          </a:xfrm>
-          <a:prstGeom prst="rect">
-            <a:avLst/>
-          </a:prstGeom>
-          <a:noFill/>
-        </p:spPr>
-        <p:txBody>
-          <a:bodyPr wrap="square" rtlCol="0">
-            <a:spAutoFit/>
-          </a:bodyPr>
-          <a:lstStyle/>
-          <a:p>
-            <a:pPr>
-              <a:lnSpc>
-                <a:spcPct val="150000"/>
-              </a:lnSpc>
-            </a:pPr>
-            <a:r>
-              <a:rPr lang="ko-KR" altLang="en-US" dirty="0">
-                <a:solidFill>
-                  <a:schemeClr val="bg1"/>
-                </a:solidFill>
-              </a:rPr>
-              <a:t>유효성 검사</a:t>
-            </a:r>
-          </a:p>
-        </p:txBody>
-      </p:sp>
-      <p:sp>
-        <p:nvSpPr>
-          <p:cNvPr id="33" name="직사각형 32">
-            <a:extLst>
-              <a:ext uri="{FF2B5EF4-FFF2-40B4-BE49-F238E27FC236}">
-                <a16:creationId xmlns:a16="http://schemas.microsoft.com/office/drawing/2014/main" id="{59A7C86F-D3AB-435D-C70E-ACFA6ABA573F}"/>
-              </a:ext>
-            </a:extLst>
-          </p:cNvPr>
-          <p:cNvSpPr/>
-          <p:nvPr/>
-        </p:nvSpPr>
-        <p:spPr>
-          <a:xfrm>
-            <a:off x="1579324" y="4207410"/>
-            <a:ext cx="4415076" cy="1445245"/>
-          </a:xfrm>
-          <a:prstGeom prst="rect">
-            <a:avLst/>
-          </a:prstGeom>
-          <a:noFill/>
-          <a:ln>
-            <a:solidFill>
-              <a:srgbClr val="FF0000"/>
-            </a:solidFill>
-          </a:ln>
-        </p:spPr>
-        <p:style>
-          <a:lnRef idx="2">
-            <a:schemeClr val="accent1">
-              <a:shade val="15000"/>
-            </a:schemeClr>
-          </a:lnRef>
-          <a:fillRef idx="1">
-            <a:schemeClr val="accent1"/>
-          </a:fillRef>
-          <a:effectRef idx="0">
-            <a:schemeClr val="accent1"/>
-          </a:effectRef>
-          <a:fontRef idx="minor">
-            <a:schemeClr val="lt1"/>
-          </a:fontRef>
-        </p:style>
-        <p:txBody>
-          <a:bodyPr rtlCol="0" anchor="ctr"/>
-          <a:lstStyle/>
-          <a:p>
-            <a:pPr algn="ctr"/>
-            <a:endParaRPr lang="ko-KR" altLang="en-US"/>
-          </a:p>
-        </p:txBody>
-      </p:sp>
-      <p:sp>
-        <p:nvSpPr>
-          <p:cNvPr id="12" name="TextBox 11">
-            <a:extLst>
-              <a:ext uri="{FF2B5EF4-FFF2-40B4-BE49-F238E27FC236}">
-                <a16:creationId xmlns:a16="http://schemas.microsoft.com/office/drawing/2014/main" id="{FCA3ABF4-13D9-855F-82F3-E44BD9EE1A1E}"/>
-              </a:ext>
-            </a:extLst>
-          </p:cNvPr>
-          <p:cNvSpPr txBox="1"/>
-          <p:nvPr/>
-        </p:nvSpPr>
-        <p:spPr>
-          <a:xfrm>
-            <a:off x="7937090" y="976722"/>
-            <a:ext cx="3866983" cy="697050"/>
-          </a:xfrm>
-          <a:prstGeom prst="rect">
-            <a:avLst/>
-          </a:prstGeom>
-          <a:noFill/>
-        </p:spPr>
-        <p:txBody>
-          <a:bodyPr wrap="square" rtlCol="0">
-            <a:spAutoFit/>
-          </a:bodyPr>
-          <a:lstStyle/>
-          <a:p>
-            <a:pPr>
-              <a:lnSpc>
-                <a:spcPct val="150000"/>
-              </a:lnSpc>
-            </a:pPr>
-            <a:r>
-              <a:rPr lang="ko-KR" altLang="en-US" sz="1400" dirty="0">
-                <a:solidFill>
-                  <a:schemeClr val="bg1"/>
-                </a:solidFill>
-              </a:rPr>
-              <a:t>프론트 시험에서의 유효성 검사와 같은 로직</a:t>
-            </a:r>
-            <a:r>
-              <a:rPr lang="en-US" altLang="ko-KR" sz="1400" dirty="0">
-                <a:solidFill>
-                  <a:schemeClr val="bg1"/>
-                </a:solidFill>
-              </a:rPr>
-              <a:t>.</a:t>
-            </a:r>
-          </a:p>
-          <a:p>
-            <a:pPr>
-              <a:lnSpc>
-                <a:spcPct val="150000"/>
-              </a:lnSpc>
-            </a:pPr>
-            <a:r>
-              <a:rPr lang="ko-KR" altLang="en-US" sz="1400" dirty="0">
-                <a:solidFill>
-                  <a:schemeClr val="bg1"/>
-                </a:solidFill>
-              </a:rPr>
-              <a:t>등록이 완료되면 </a:t>
-            </a:r>
-            <a:r>
-              <a:rPr lang="ko-KR" altLang="en-US" sz="1400" dirty="0" err="1">
-                <a:solidFill>
-                  <a:schemeClr val="bg1"/>
-                </a:solidFill>
-              </a:rPr>
-              <a:t>모달</a:t>
-            </a:r>
-            <a:r>
-              <a:rPr lang="ko-KR" altLang="en-US" sz="1400" dirty="0">
-                <a:solidFill>
-                  <a:schemeClr val="bg1"/>
-                </a:solidFill>
-              </a:rPr>
-              <a:t> 창을 닫는다</a:t>
-            </a:r>
-          </a:p>
-        </p:txBody>
-      </p:sp>
-      <p:sp>
-        <p:nvSpPr>
-          <p:cNvPr id="6" name="TextBox 5">
-            <a:extLst>
-              <a:ext uri="{FF2B5EF4-FFF2-40B4-BE49-F238E27FC236}">
-                <a16:creationId xmlns:a16="http://schemas.microsoft.com/office/drawing/2014/main" id="{E0A6E31C-3CC8-802D-CDEE-22B9A5B3B82A}"/>
-              </a:ext>
-            </a:extLst>
-          </p:cNvPr>
-          <p:cNvSpPr txBox="1"/>
-          <p:nvPr/>
-        </p:nvSpPr>
-        <p:spPr>
-          <a:xfrm>
-            <a:off x="7777018" y="1955346"/>
-            <a:ext cx="4414982" cy="3784882"/>
-          </a:xfrm>
-          <a:prstGeom prst="rect">
-            <a:avLst/>
-          </a:prstGeom>
-          <a:noFill/>
-        </p:spPr>
-        <p:txBody>
-          <a:bodyPr wrap="square">
-            <a:spAutoFit/>
-          </a:bodyPr>
-          <a:lstStyle/>
-          <a:p>
-            <a:pPr>
-              <a:lnSpc>
-                <a:spcPts val="1650"/>
-              </a:lnSpc>
-              <a:buNone/>
-            </a:pPr>
-            <a:r>
-              <a:rPr lang="en-US" altLang="ko-KR" sz="1200" b="0" dirty="0">
-                <a:solidFill>
-                  <a:srgbClr val="C678DD"/>
-                </a:solidFill>
-                <a:effectLst/>
-                <a:latin typeface="D2Coding ligature" panose="020B0609020101020101" pitchFamily="49" charset="-127"/>
-                <a:ea typeface="D2Coding ligature" panose="020B0609020101020101" pitchFamily="49" charset="-127"/>
-              </a:rPr>
-              <a:t>function</a:t>
-            </a:r>
-            <a:r>
-              <a:rPr lang="en-US" altLang="ko-KR" sz="1200" b="0" dirty="0">
-                <a:solidFill>
-                  <a:srgbClr val="ABB2BF"/>
-                </a:solidFill>
-                <a:effectLst/>
-                <a:latin typeface="D2Coding ligature" panose="020B0609020101020101" pitchFamily="49" charset="-127"/>
-                <a:ea typeface="D2Coding ligature" panose="020B0609020101020101" pitchFamily="49" charset="-127"/>
-              </a:rPr>
-              <a:t> </a:t>
-            </a:r>
-            <a:r>
-              <a:rPr lang="en-US" altLang="ko-KR" sz="1200" b="0" dirty="0" err="1">
-                <a:solidFill>
-                  <a:srgbClr val="61AFEF"/>
-                </a:solidFill>
-                <a:effectLst/>
-                <a:latin typeface="D2Coding ligature" panose="020B0609020101020101" pitchFamily="49" charset="-127"/>
-                <a:ea typeface="D2Coding ligature" panose="020B0609020101020101" pitchFamily="49" charset="-127"/>
-              </a:rPr>
-              <a:t>checkValidity</a:t>
-            </a:r>
-            <a:r>
-              <a:rPr lang="en-US" altLang="ko-KR" sz="1200" b="0" dirty="0">
-                <a:solidFill>
-                  <a:srgbClr val="ABB2BF"/>
-                </a:solidFill>
-                <a:effectLst/>
-                <a:latin typeface="D2Coding ligature" panose="020B0609020101020101" pitchFamily="49" charset="-127"/>
-                <a:ea typeface="D2Coding ligature" panose="020B0609020101020101" pitchFamily="49" charset="-127"/>
-              </a:rPr>
-              <a:t>(){</a:t>
-            </a:r>
-          </a:p>
-          <a:p>
-            <a:pPr>
-              <a:lnSpc>
-                <a:spcPts val="1650"/>
-              </a:lnSpc>
-              <a:buNone/>
-            </a:pPr>
-            <a:r>
-              <a:rPr lang="en-US" altLang="ko-KR" sz="1200" b="0" dirty="0">
-                <a:solidFill>
-                  <a:srgbClr val="ABB2BF"/>
-                </a:solidFill>
-                <a:effectLst/>
-                <a:latin typeface="D2Coding ligature" panose="020B0609020101020101" pitchFamily="49" charset="-127"/>
-                <a:ea typeface="D2Coding ligature" panose="020B0609020101020101" pitchFamily="49" charset="-127"/>
-              </a:rPr>
-              <a:t>  </a:t>
-            </a:r>
-            <a:r>
-              <a:rPr lang="en-US" altLang="ko-KR" sz="1200" b="0" dirty="0">
-                <a:solidFill>
-                  <a:srgbClr val="C678DD"/>
-                </a:solidFill>
-                <a:effectLst/>
-                <a:latin typeface="D2Coding ligature" panose="020B0609020101020101" pitchFamily="49" charset="-127"/>
-                <a:ea typeface="D2Coding ligature" panose="020B0609020101020101" pitchFamily="49" charset="-127"/>
-              </a:rPr>
-              <a:t>const</a:t>
-            </a:r>
-            <a:r>
-              <a:rPr lang="en-US" altLang="ko-KR" sz="1200" b="0" dirty="0">
-                <a:solidFill>
-                  <a:srgbClr val="ABB2BF"/>
-                </a:solidFill>
-                <a:effectLst/>
-                <a:latin typeface="D2Coding ligature" panose="020B0609020101020101" pitchFamily="49" charset="-127"/>
-                <a:ea typeface="D2Coding ligature" panose="020B0609020101020101" pitchFamily="49" charset="-127"/>
-              </a:rPr>
-              <a:t> </a:t>
-            </a:r>
-            <a:r>
-              <a:rPr lang="en-US" altLang="ko-KR" sz="1200" b="0" dirty="0">
-                <a:solidFill>
-                  <a:srgbClr val="E5C07B"/>
-                </a:solidFill>
-                <a:effectLst/>
-                <a:latin typeface="D2Coding ligature" panose="020B0609020101020101" pitchFamily="49" charset="-127"/>
-                <a:ea typeface="D2Coding ligature" panose="020B0609020101020101" pitchFamily="49" charset="-127"/>
-              </a:rPr>
-              <a:t>content</a:t>
-            </a:r>
-            <a:r>
-              <a:rPr lang="en-US" altLang="ko-KR" sz="1200" b="0" dirty="0">
-                <a:solidFill>
-                  <a:srgbClr val="ABB2BF"/>
-                </a:solidFill>
-                <a:effectLst/>
-                <a:latin typeface="D2Coding ligature" panose="020B0609020101020101" pitchFamily="49" charset="-127"/>
-                <a:ea typeface="D2Coding ligature" panose="020B0609020101020101" pitchFamily="49" charset="-127"/>
-              </a:rPr>
-              <a:t> </a:t>
-            </a:r>
-            <a:r>
-              <a:rPr lang="en-US" altLang="ko-KR" sz="1200" b="0" dirty="0">
-                <a:solidFill>
-                  <a:srgbClr val="56B6C2"/>
-                </a:solidFill>
-                <a:effectLst/>
-                <a:latin typeface="D2Coding ligature" panose="020B0609020101020101" pitchFamily="49" charset="-127"/>
-                <a:ea typeface="D2Coding ligature" panose="020B0609020101020101" pitchFamily="49" charset="-127"/>
-              </a:rPr>
-              <a:t>=</a:t>
-            </a:r>
-            <a:r>
-              <a:rPr lang="en-US" altLang="ko-KR" sz="1200" b="0" dirty="0">
-                <a:solidFill>
-                  <a:srgbClr val="ABB2BF"/>
-                </a:solidFill>
-                <a:effectLst/>
-                <a:latin typeface="D2Coding ligature" panose="020B0609020101020101" pitchFamily="49" charset="-127"/>
-                <a:ea typeface="D2Coding ligature" panose="020B0609020101020101" pitchFamily="49" charset="-127"/>
-              </a:rPr>
-              <a:t> </a:t>
-            </a:r>
-            <a:r>
-              <a:rPr lang="en-US" altLang="ko-KR" sz="1200" b="0" dirty="0" err="1">
-                <a:solidFill>
-                  <a:srgbClr val="E5C07B"/>
-                </a:solidFill>
-                <a:effectLst/>
-                <a:latin typeface="D2Coding ligature" panose="020B0609020101020101" pitchFamily="49" charset="-127"/>
-                <a:ea typeface="D2Coding ligature" panose="020B0609020101020101" pitchFamily="49" charset="-127"/>
-              </a:rPr>
-              <a:t>document</a:t>
-            </a:r>
-            <a:r>
-              <a:rPr lang="en-US" altLang="ko-KR" sz="1200" b="0" dirty="0" err="1">
-                <a:solidFill>
-                  <a:srgbClr val="ABB2BF"/>
-                </a:solidFill>
-                <a:effectLst/>
-                <a:latin typeface="D2Coding ligature" panose="020B0609020101020101" pitchFamily="49" charset="-127"/>
-                <a:ea typeface="D2Coding ligature" panose="020B0609020101020101" pitchFamily="49" charset="-127"/>
-              </a:rPr>
-              <a:t>.</a:t>
-            </a:r>
-            <a:r>
-              <a:rPr lang="en-US" altLang="ko-KR" sz="1200" b="0" dirty="0" err="1">
-                <a:solidFill>
-                  <a:srgbClr val="61AFEF"/>
-                </a:solidFill>
-                <a:effectLst/>
-                <a:latin typeface="D2Coding ligature" panose="020B0609020101020101" pitchFamily="49" charset="-127"/>
-                <a:ea typeface="D2Coding ligature" panose="020B0609020101020101" pitchFamily="49" charset="-127"/>
-              </a:rPr>
-              <a:t>getElementById</a:t>
-            </a:r>
-            <a:r>
-              <a:rPr lang="en-US" altLang="ko-KR" sz="1200" b="0" dirty="0">
-                <a:solidFill>
-                  <a:srgbClr val="ABB2BF"/>
-                </a:solidFill>
-                <a:effectLst/>
-                <a:latin typeface="D2Coding ligature" panose="020B0609020101020101" pitchFamily="49" charset="-127"/>
-                <a:ea typeface="D2Coding ligature" panose="020B0609020101020101" pitchFamily="49" charset="-127"/>
-              </a:rPr>
-              <a:t>(</a:t>
-            </a:r>
-            <a:r>
-              <a:rPr lang="en-US" altLang="ko-KR" sz="1200" b="0" dirty="0">
-                <a:solidFill>
-                  <a:srgbClr val="98C379"/>
-                </a:solidFill>
-                <a:effectLst/>
-                <a:latin typeface="D2Coding ligature" panose="020B0609020101020101" pitchFamily="49" charset="-127"/>
-                <a:ea typeface="D2Coding ligature" panose="020B0609020101020101" pitchFamily="49" charset="-127"/>
-              </a:rPr>
-              <a:t>"review-	content"</a:t>
-            </a:r>
-            <a:r>
-              <a:rPr lang="en-US" altLang="ko-KR" sz="1200" b="0" dirty="0">
-                <a:solidFill>
-                  <a:srgbClr val="ABB2BF"/>
-                </a:solidFill>
-                <a:effectLst/>
-                <a:latin typeface="D2Coding ligature" panose="020B0609020101020101" pitchFamily="49" charset="-127"/>
-                <a:ea typeface="D2Coding ligature" panose="020B0609020101020101" pitchFamily="49" charset="-127"/>
-              </a:rPr>
-              <a:t>);</a:t>
-            </a:r>
-          </a:p>
-          <a:p>
-            <a:pPr>
-              <a:lnSpc>
-                <a:spcPts val="1650"/>
-              </a:lnSpc>
-              <a:buNone/>
-            </a:pPr>
-            <a:r>
-              <a:rPr lang="en-US" altLang="ko-KR" sz="1200" b="0" dirty="0">
-                <a:solidFill>
-                  <a:srgbClr val="ABB2BF"/>
-                </a:solidFill>
-                <a:effectLst/>
-                <a:latin typeface="D2Coding ligature" panose="020B0609020101020101" pitchFamily="49" charset="-127"/>
-                <a:ea typeface="D2Coding ligature" panose="020B0609020101020101" pitchFamily="49" charset="-127"/>
-              </a:rPr>
-              <a:t>  </a:t>
-            </a:r>
-            <a:r>
-              <a:rPr lang="en-US" altLang="ko-KR" sz="1200" b="0" dirty="0">
-                <a:solidFill>
-                  <a:srgbClr val="C678DD"/>
-                </a:solidFill>
-                <a:effectLst/>
-                <a:latin typeface="D2Coding ligature" panose="020B0609020101020101" pitchFamily="49" charset="-127"/>
-                <a:ea typeface="D2Coding ligature" panose="020B0609020101020101" pitchFamily="49" charset="-127"/>
-              </a:rPr>
-              <a:t>const</a:t>
-            </a:r>
-            <a:r>
-              <a:rPr lang="en-US" altLang="ko-KR" sz="1200" b="0" dirty="0">
-                <a:solidFill>
-                  <a:srgbClr val="ABB2BF"/>
-                </a:solidFill>
-                <a:effectLst/>
-                <a:latin typeface="D2Coding ligature" panose="020B0609020101020101" pitchFamily="49" charset="-127"/>
-                <a:ea typeface="D2Coding ligature" panose="020B0609020101020101" pitchFamily="49" charset="-127"/>
-              </a:rPr>
-              <a:t> </a:t>
-            </a:r>
-            <a:r>
-              <a:rPr lang="en-US" altLang="ko-KR" sz="1200" b="0" dirty="0">
-                <a:solidFill>
-                  <a:srgbClr val="E5C07B"/>
-                </a:solidFill>
-                <a:effectLst/>
-                <a:latin typeface="D2Coding ligature" panose="020B0609020101020101" pitchFamily="49" charset="-127"/>
-                <a:ea typeface="D2Coding ligature" panose="020B0609020101020101" pitchFamily="49" charset="-127"/>
-              </a:rPr>
-              <a:t>title</a:t>
-            </a:r>
-            <a:r>
-              <a:rPr lang="en-US" altLang="ko-KR" sz="1200" b="0" dirty="0">
-                <a:solidFill>
-                  <a:srgbClr val="ABB2BF"/>
-                </a:solidFill>
-                <a:effectLst/>
-                <a:latin typeface="D2Coding ligature" panose="020B0609020101020101" pitchFamily="49" charset="-127"/>
-                <a:ea typeface="D2Coding ligature" panose="020B0609020101020101" pitchFamily="49" charset="-127"/>
-              </a:rPr>
-              <a:t> </a:t>
-            </a:r>
-            <a:r>
-              <a:rPr lang="en-US" altLang="ko-KR" sz="1200" b="0" dirty="0">
-                <a:solidFill>
-                  <a:srgbClr val="56B6C2"/>
-                </a:solidFill>
-                <a:effectLst/>
-                <a:latin typeface="D2Coding ligature" panose="020B0609020101020101" pitchFamily="49" charset="-127"/>
-                <a:ea typeface="D2Coding ligature" panose="020B0609020101020101" pitchFamily="49" charset="-127"/>
-              </a:rPr>
-              <a:t>=</a:t>
-            </a:r>
-            <a:r>
-              <a:rPr lang="en-US" altLang="ko-KR" sz="1200" b="0" dirty="0">
-                <a:solidFill>
-                  <a:srgbClr val="ABB2BF"/>
-                </a:solidFill>
-                <a:effectLst/>
-                <a:latin typeface="D2Coding ligature" panose="020B0609020101020101" pitchFamily="49" charset="-127"/>
-                <a:ea typeface="D2Coding ligature" panose="020B0609020101020101" pitchFamily="49" charset="-127"/>
-              </a:rPr>
-              <a:t> </a:t>
-            </a:r>
-            <a:r>
-              <a:rPr lang="en-US" altLang="ko-KR" sz="1200" b="0" dirty="0" err="1">
-                <a:solidFill>
-                  <a:srgbClr val="E5C07B"/>
-                </a:solidFill>
-                <a:effectLst/>
-                <a:latin typeface="D2Coding ligature" panose="020B0609020101020101" pitchFamily="49" charset="-127"/>
-                <a:ea typeface="D2Coding ligature" panose="020B0609020101020101" pitchFamily="49" charset="-127"/>
-              </a:rPr>
-              <a:t>document</a:t>
-            </a:r>
-            <a:r>
-              <a:rPr lang="en-US" altLang="ko-KR" sz="1200" b="0" dirty="0" err="1">
-                <a:solidFill>
-                  <a:srgbClr val="ABB2BF"/>
-                </a:solidFill>
-                <a:effectLst/>
-                <a:latin typeface="D2Coding ligature" panose="020B0609020101020101" pitchFamily="49" charset="-127"/>
-                <a:ea typeface="D2Coding ligature" panose="020B0609020101020101" pitchFamily="49" charset="-127"/>
-              </a:rPr>
-              <a:t>.</a:t>
-            </a:r>
-            <a:r>
-              <a:rPr lang="en-US" altLang="ko-KR" sz="1200" b="0" dirty="0" err="1">
-                <a:solidFill>
-                  <a:srgbClr val="61AFEF"/>
-                </a:solidFill>
-                <a:effectLst/>
-                <a:latin typeface="D2Coding ligature" panose="020B0609020101020101" pitchFamily="49" charset="-127"/>
-                <a:ea typeface="D2Coding ligature" panose="020B0609020101020101" pitchFamily="49" charset="-127"/>
-              </a:rPr>
-              <a:t>getElementById</a:t>
-            </a:r>
-            <a:r>
-              <a:rPr lang="en-US" altLang="ko-KR" sz="1200" b="0" dirty="0">
-                <a:solidFill>
-                  <a:srgbClr val="ABB2BF"/>
-                </a:solidFill>
-                <a:effectLst/>
-                <a:latin typeface="D2Coding ligature" panose="020B0609020101020101" pitchFamily="49" charset="-127"/>
-                <a:ea typeface="D2Coding ligature" panose="020B0609020101020101" pitchFamily="49" charset="-127"/>
-              </a:rPr>
-              <a:t>(</a:t>
-            </a:r>
-            <a:r>
-              <a:rPr lang="en-US" altLang="ko-KR" sz="1200" b="0" dirty="0">
-                <a:solidFill>
-                  <a:srgbClr val="98C379"/>
-                </a:solidFill>
-                <a:effectLst/>
-                <a:latin typeface="D2Coding ligature" panose="020B0609020101020101" pitchFamily="49" charset="-127"/>
-                <a:ea typeface="D2Coding ligature" panose="020B0609020101020101" pitchFamily="49" charset="-127"/>
-              </a:rPr>
-              <a:t>"review-title"</a:t>
-            </a:r>
-            <a:r>
-              <a:rPr lang="en-US" altLang="ko-KR" sz="1200" b="0" dirty="0">
-                <a:solidFill>
-                  <a:srgbClr val="ABB2BF"/>
-                </a:solidFill>
-                <a:effectLst/>
-                <a:latin typeface="D2Coding ligature" panose="020B0609020101020101" pitchFamily="49" charset="-127"/>
-                <a:ea typeface="D2Coding ligature" panose="020B0609020101020101" pitchFamily="49" charset="-127"/>
-              </a:rPr>
-              <a:t>);</a:t>
-            </a:r>
-          </a:p>
-          <a:p>
-            <a:pPr>
-              <a:lnSpc>
-                <a:spcPts val="1650"/>
-              </a:lnSpc>
-              <a:buNone/>
-            </a:pPr>
-            <a:br>
-              <a:rPr lang="en-US" altLang="ko-KR" sz="1200" b="0" dirty="0">
-                <a:solidFill>
-                  <a:srgbClr val="ABB2BF"/>
-                </a:solidFill>
-                <a:effectLst/>
-                <a:latin typeface="D2Coding ligature" panose="020B0609020101020101" pitchFamily="49" charset="-127"/>
-                <a:ea typeface="D2Coding ligature" panose="020B0609020101020101" pitchFamily="49" charset="-127"/>
-              </a:rPr>
-            </a:br>
-            <a:br>
-              <a:rPr lang="en-US" altLang="ko-KR" sz="1200" b="0" dirty="0">
-                <a:solidFill>
-                  <a:srgbClr val="ABB2BF"/>
-                </a:solidFill>
-                <a:effectLst/>
-                <a:latin typeface="D2Coding ligature" panose="020B0609020101020101" pitchFamily="49" charset="-127"/>
-                <a:ea typeface="D2Coding ligature" panose="020B0609020101020101" pitchFamily="49" charset="-127"/>
-              </a:rPr>
-            </a:br>
-            <a:endParaRPr lang="en-US" altLang="ko-KR" sz="1200" b="0" dirty="0">
-              <a:solidFill>
-                <a:srgbClr val="ABB2BF"/>
-              </a:solidFill>
-              <a:effectLst/>
-              <a:latin typeface="D2Coding ligature" panose="020B0609020101020101" pitchFamily="49" charset="-127"/>
-              <a:ea typeface="D2Coding ligature" panose="020B0609020101020101" pitchFamily="49" charset="-127"/>
-            </a:endParaRPr>
-          </a:p>
-          <a:p>
-            <a:pPr>
-              <a:lnSpc>
-                <a:spcPts val="1650"/>
-              </a:lnSpc>
-              <a:buNone/>
-            </a:pPr>
-            <a:r>
-              <a:rPr lang="en-US" altLang="ko-KR" sz="1200" b="0" dirty="0">
-                <a:solidFill>
-                  <a:srgbClr val="ABB2BF"/>
-                </a:solidFill>
-                <a:effectLst/>
-                <a:latin typeface="D2Coding ligature" panose="020B0609020101020101" pitchFamily="49" charset="-127"/>
-                <a:ea typeface="D2Coding ligature" panose="020B0609020101020101" pitchFamily="49" charset="-127"/>
-              </a:rPr>
-              <a:t>  </a:t>
-            </a:r>
-            <a:r>
-              <a:rPr lang="en-US" altLang="ko-KR" sz="1200" b="0" dirty="0">
-                <a:solidFill>
-                  <a:srgbClr val="C678DD"/>
-                </a:solidFill>
-                <a:effectLst/>
-                <a:latin typeface="D2Coding ligature" panose="020B0609020101020101" pitchFamily="49" charset="-127"/>
-                <a:ea typeface="D2Coding ligature" panose="020B0609020101020101" pitchFamily="49" charset="-127"/>
-              </a:rPr>
-              <a:t>if</a:t>
-            </a:r>
-            <a:r>
-              <a:rPr lang="en-US" altLang="ko-KR" sz="1200" b="0" dirty="0">
-                <a:solidFill>
-                  <a:srgbClr val="ABB2BF"/>
-                </a:solidFill>
-                <a:effectLst/>
-                <a:latin typeface="D2Coding ligature" panose="020B0609020101020101" pitchFamily="49" charset="-127"/>
-                <a:ea typeface="D2Coding ligature" panose="020B0609020101020101" pitchFamily="49" charset="-127"/>
-              </a:rPr>
-              <a:t>(</a:t>
-            </a:r>
-            <a:r>
-              <a:rPr lang="en-US" altLang="ko-KR" sz="1200" b="0" dirty="0" err="1">
-                <a:solidFill>
-                  <a:srgbClr val="E5C07B"/>
-                </a:solidFill>
-                <a:effectLst/>
-                <a:latin typeface="D2Coding ligature" panose="020B0609020101020101" pitchFamily="49" charset="-127"/>
-                <a:ea typeface="D2Coding ligature" panose="020B0609020101020101" pitchFamily="49" charset="-127"/>
-              </a:rPr>
-              <a:t>content</a:t>
-            </a:r>
-            <a:r>
-              <a:rPr lang="en-US" altLang="ko-KR" sz="1200" b="0" dirty="0" err="1">
-                <a:solidFill>
-                  <a:srgbClr val="ABB2BF"/>
-                </a:solidFill>
-                <a:effectLst/>
-                <a:latin typeface="D2Coding ligature" panose="020B0609020101020101" pitchFamily="49" charset="-127"/>
-                <a:ea typeface="D2Coding ligature" panose="020B0609020101020101" pitchFamily="49" charset="-127"/>
-              </a:rPr>
-              <a:t>.</a:t>
-            </a:r>
-            <a:r>
-              <a:rPr lang="en-US" altLang="ko-KR" sz="1200" b="0" dirty="0" err="1">
-                <a:solidFill>
-                  <a:srgbClr val="E06C75"/>
-                </a:solidFill>
-                <a:effectLst/>
-                <a:latin typeface="D2Coding ligature" panose="020B0609020101020101" pitchFamily="49" charset="-127"/>
-                <a:ea typeface="D2Coding ligature" panose="020B0609020101020101" pitchFamily="49" charset="-127"/>
-              </a:rPr>
-              <a:t>value</a:t>
-            </a:r>
-            <a:r>
-              <a:rPr lang="en-US" altLang="ko-KR" sz="1200" b="0" dirty="0">
-                <a:solidFill>
-                  <a:srgbClr val="ABB2BF"/>
-                </a:solidFill>
-                <a:effectLst/>
-                <a:latin typeface="D2Coding ligature" panose="020B0609020101020101" pitchFamily="49" charset="-127"/>
-                <a:ea typeface="D2Coding ligature" panose="020B0609020101020101" pitchFamily="49" charset="-127"/>
-              </a:rPr>
-              <a:t> </a:t>
-            </a:r>
-            <a:r>
-              <a:rPr lang="en-US" altLang="ko-KR" sz="1200" b="0" dirty="0">
-                <a:solidFill>
-                  <a:srgbClr val="56B6C2"/>
-                </a:solidFill>
-                <a:effectLst/>
-                <a:latin typeface="D2Coding ligature" panose="020B0609020101020101" pitchFamily="49" charset="-127"/>
-                <a:ea typeface="D2Coding ligature" panose="020B0609020101020101" pitchFamily="49" charset="-127"/>
-              </a:rPr>
-              <a:t>==</a:t>
-            </a:r>
-            <a:r>
-              <a:rPr lang="en-US" altLang="ko-KR" sz="1200" b="0" dirty="0">
-                <a:solidFill>
-                  <a:srgbClr val="98C379"/>
-                </a:solidFill>
-                <a:effectLst/>
-                <a:latin typeface="D2Coding ligature" panose="020B0609020101020101" pitchFamily="49" charset="-127"/>
-                <a:ea typeface="D2Coding ligature" panose="020B0609020101020101" pitchFamily="49" charset="-127"/>
-              </a:rPr>
-              <a:t>""</a:t>
-            </a:r>
-            <a:r>
-              <a:rPr lang="en-US" altLang="ko-KR" sz="1200" b="0" dirty="0">
-                <a:solidFill>
-                  <a:srgbClr val="ABB2BF"/>
-                </a:solidFill>
-                <a:effectLst/>
-                <a:latin typeface="D2Coding ligature" panose="020B0609020101020101" pitchFamily="49" charset="-127"/>
-                <a:ea typeface="D2Coding ligature" panose="020B0609020101020101" pitchFamily="49" charset="-127"/>
-              </a:rPr>
-              <a:t>){</a:t>
-            </a:r>
-          </a:p>
-          <a:p>
-            <a:pPr>
-              <a:lnSpc>
-                <a:spcPts val="1650"/>
-              </a:lnSpc>
-              <a:buNone/>
-            </a:pPr>
-            <a:r>
-              <a:rPr lang="en-US" altLang="ko-KR" sz="1200" b="0" dirty="0">
-                <a:solidFill>
-                  <a:srgbClr val="ABB2BF"/>
-                </a:solidFill>
-                <a:effectLst/>
-                <a:latin typeface="D2Coding ligature" panose="020B0609020101020101" pitchFamily="49" charset="-127"/>
-                <a:ea typeface="D2Coding ligature" panose="020B0609020101020101" pitchFamily="49" charset="-127"/>
-              </a:rPr>
-              <a:t>    </a:t>
-            </a:r>
-            <a:r>
-              <a:rPr lang="en-US" altLang="ko-KR" sz="1200" b="0" dirty="0">
-                <a:solidFill>
-                  <a:srgbClr val="56B6C2"/>
-                </a:solidFill>
-                <a:effectLst/>
-                <a:latin typeface="D2Coding ligature" panose="020B0609020101020101" pitchFamily="49" charset="-127"/>
-                <a:ea typeface="D2Coding ligature" panose="020B0609020101020101" pitchFamily="49" charset="-127"/>
-              </a:rPr>
-              <a:t>alert</a:t>
-            </a:r>
-            <a:r>
-              <a:rPr lang="en-US" altLang="ko-KR" sz="1200" b="0" dirty="0">
-                <a:solidFill>
-                  <a:srgbClr val="ABB2BF"/>
-                </a:solidFill>
-                <a:effectLst/>
-                <a:latin typeface="D2Coding ligature" panose="020B0609020101020101" pitchFamily="49" charset="-127"/>
-                <a:ea typeface="D2Coding ligature" panose="020B0609020101020101" pitchFamily="49" charset="-127"/>
-              </a:rPr>
-              <a:t>(</a:t>
-            </a:r>
-            <a:r>
-              <a:rPr lang="en-US" altLang="ko-KR" sz="1200" b="0" dirty="0">
-                <a:solidFill>
-                  <a:srgbClr val="98C379"/>
-                </a:solidFill>
-                <a:effectLst/>
-                <a:latin typeface="D2Coding ligature" panose="020B0609020101020101" pitchFamily="49" charset="-127"/>
-                <a:ea typeface="D2Coding ligature" panose="020B0609020101020101" pitchFamily="49" charset="-127"/>
-              </a:rPr>
-              <a:t>"</a:t>
-            </a:r>
-            <a:r>
-              <a:rPr lang="ko-KR" altLang="en-US" sz="1200" b="0" dirty="0">
-                <a:solidFill>
-                  <a:srgbClr val="98C379"/>
-                </a:solidFill>
-                <a:effectLst/>
-                <a:latin typeface="D2Coding ligature" panose="020B0609020101020101" pitchFamily="49" charset="-127"/>
-                <a:ea typeface="D2Coding ligature" panose="020B0609020101020101" pitchFamily="49" charset="-127"/>
-              </a:rPr>
-              <a:t>내용을 입력하세요</a:t>
-            </a:r>
-            <a:r>
-              <a:rPr lang="en-US" altLang="ko-KR" sz="1200" b="0" dirty="0">
-                <a:solidFill>
-                  <a:srgbClr val="98C379"/>
-                </a:solidFill>
-                <a:effectLst/>
-                <a:latin typeface="D2Coding ligature" panose="020B0609020101020101" pitchFamily="49" charset="-127"/>
-                <a:ea typeface="D2Coding ligature" panose="020B0609020101020101" pitchFamily="49" charset="-127"/>
-              </a:rPr>
-              <a:t>."</a:t>
-            </a:r>
-            <a:r>
-              <a:rPr lang="en-US" altLang="ko-KR" sz="1200" b="0" dirty="0">
-                <a:solidFill>
-                  <a:srgbClr val="ABB2BF"/>
-                </a:solidFill>
-                <a:effectLst/>
-                <a:latin typeface="D2Coding ligature" panose="020B0609020101020101" pitchFamily="49" charset="-127"/>
-                <a:ea typeface="D2Coding ligature" panose="020B0609020101020101" pitchFamily="49" charset="-127"/>
-              </a:rPr>
-              <a:t>);</a:t>
-            </a:r>
-          </a:p>
-          <a:p>
-            <a:pPr>
-              <a:lnSpc>
-                <a:spcPts val="1650"/>
-              </a:lnSpc>
-              <a:buNone/>
-            </a:pPr>
-            <a:r>
-              <a:rPr lang="en-US" altLang="ko-KR" sz="1200" b="0" dirty="0">
-                <a:solidFill>
-                  <a:srgbClr val="ABB2BF"/>
-                </a:solidFill>
-                <a:effectLst/>
-                <a:latin typeface="D2Coding ligature" panose="020B0609020101020101" pitchFamily="49" charset="-127"/>
-                <a:ea typeface="D2Coding ligature" panose="020B0609020101020101" pitchFamily="49" charset="-127"/>
-              </a:rPr>
-              <a:t>  } </a:t>
-            </a:r>
-            <a:r>
-              <a:rPr lang="en-US" altLang="ko-KR" sz="1200" b="0" dirty="0">
-                <a:solidFill>
-                  <a:srgbClr val="C678DD"/>
-                </a:solidFill>
-                <a:effectLst/>
-                <a:latin typeface="D2Coding ligature" panose="020B0609020101020101" pitchFamily="49" charset="-127"/>
-                <a:ea typeface="D2Coding ligature" panose="020B0609020101020101" pitchFamily="49" charset="-127"/>
-              </a:rPr>
-              <a:t>else</a:t>
-            </a:r>
-            <a:r>
-              <a:rPr lang="en-US" altLang="ko-KR" sz="1200" b="0" dirty="0">
-                <a:solidFill>
-                  <a:srgbClr val="ABB2BF"/>
-                </a:solidFill>
-                <a:effectLst/>
-                <a:latin typeface="D2Coding ligature" panose="020B0609020101020101" pitchFamily="49" charset="-127"/>
-                <a:ea typeface="D2Coding ligature" panose="020B0609020101020101" pitchFamily="49" charset="-127"/>
-              </a:rPr>
-              <a:t> </a:t>
-            </a:r>
-            <a:r>
-              <a:rPr lang="en-US" altLang="ko-KR" sz="1200" b="0" dirty="0">
-                <a:solidFill>
-                  <a:srgbClr val="C678DD"/>
-                </a:solidFill>
-                <a:effectLst/>
-                <a:latin typeface="D2Coding ligature" panose="020B0609020101020101" pitchFamily="49" charset="-127"/>
-                <a:ea typeface="D2Coding ligature" panose="020B0609020101020101" pitchFamily="49" charset="-127"/>
-              </a:rPr>
-              <a:t>if</a:t>
-            </a:r>
-            <a:r>
-              <a:rPr lang="en-US" altLang="ko-KR" sz="1200" b="0" dirty="0">
-                <a:solidFill>
-                  <a:srgbClr val="ABB2BF"/>
-                </a:solidFill>
-                <a:effectLst/>
-                <a:latin typeface="D2Coding ligature" panose="020B0609020101020101" pitchFamily="49" charset="-127"/>
-                <a:ea typeface="D2Coding ligature" panose="020B0609020101020101" pitchFamily="49" charset="-127"/>
-              </a:rPr>
-              <a:t>(</a:t>
-            </a:r>
-            <a:r>
-              <a:rPr lang="en-US" altLang="ko-KR" sz="1200" b="0" dirty="0" err="1">
-                <a:solidFill>
-                  <a:srgbClr val="E5C07B"/>
-                </a:solidFill>
-                <a:effectLst/>
-                <a:latin typeface="D2Coding ligature" panose="020B0609020101020101" pitchFamily="49" charset="-127"/>
-                <a:ea typeface="D2Coding ligature" panose="020B0609020101020101" pitchFamily="49" charset="-127"/>
-              </a:rPr>
-              <a:t>title</a:t>
-            </a:r>
-            <a:r>
-              <a:rPr lang="en-US" altLang="ko-KR" sz="1200" b="0" dirty="0" err="1">
-                <a:solidFill>
-                  <a:srgbClr val="ABB2BF"/>
-                </a:solidFill>
-                <a:effectLst/>
-                <a:latin typeface="D2Coding ligature" panose="020B0609020101020101" pitchFamily="49" charset="-127"/>
-                <a:ea typeface="D2Coding ligature" panose="020B0609020101020101" pitchFamily="49" charset="-127"/>
-              </a:rPr>
-              <a:t>.</a:t>
-            </a:r>
-            <a:r>
-              <a:rPr lang="en-US" altLang="ko-KR" sz="1200" b="0" dirty="0" err="1">
-                <a:solidFill>
-                  <a:srgbClr val="E06C75"/>
-                </a:solidFill>
-                <a:effectLst/>
-                <a:latin typeface="D2Coding ligature" panose="020B0609020101020101" pitchFamily="49" charset="-127"/>
-                <a:ea typeface="D2Coding ligature" panose="020B0609020101020101" pitchFamily="49" charset="-127"/>
-              </a:rPr>
-              <a:t>value</a:t>
-            </a:r>
-            <a:r>
-              <a:rPr lang="en-US" altLang="ko-KR" sz="1200" b="0" dirty="0">
-                <a:solidFill>
-                  <a:srgbClr val="ABB2BF"/>
-                </a:solidFill>
-                <a:effectLst/>
-                <a:latin typeface="D2Coding ligature" panose="020B0609020101020101" pitchFamily="49" charset="-127"/>
-                <a:ea typeface="D2Coding ligature" panose="020B0609020101020101" pitchFamily="49" charset="-127"/>
-              </a:rPr>
-              <a:t> </a:t>
-            </a:r>
-            <a:r>
-              <a:rPr lang="en-US" altLang="ko-KR" sz="1200" b="0" dirty="0">
-                <a:solidFill>
-                  <a:srgbClr val="56B6C2"/>
-                </a:solidFill>
-                <a:effectLst/>
-                <a:latin typeface="D2Coding ligature" panose="020B0609020101020101" pitchFamily="49" charset="-127"/>
-                <a:ea typeface="D2Coding ligature" panose="020B0609020101020101" pitchFamily="49" charset="-127"/>
-              </a:rPr>
-              <a:t>==</a:t>
-            </a:r>
-            <a:r>
-              <a:rPr lang="en-US" altLang="ko-KR" sz="1200" b="0" dirty="0">
-                <a:solidFill>
-                  <a:srgbClr val="ABB2BF"/>
-                </a:solidFill>
-                <a:effectLst/>
-                <a:latin typeface="D2Coding ligature" panose="020B0609020101020101" pitchFamily="49" charset="-127"/>
-                <a:ea typeface="D2Coding ligature" panose="020B0609020101020101" pitchFamily="49" charset="-127"/>
-              </a:rPr>
-              <a:t> </a:t>
-            </a:r>
-            <a:r>
-              <a:rPr lang="en-US" altLang="ko-KR" sz="1200" b="0" dirty="0">
-                <a:solidFill>
-                  <a:srgbClr val="98C379"/>
-                </a:solidFill>
-                <a:effectLst/>
-                <a:latin typeface="D2Coding ligature" panose="020B0609020101020101" pitchFamily="49" charset="-127"/>
-                <a:ea typeface="D2Coding ligature" panose="020B0609020101020101" pitchFamily="49" charset="-127"/>
-              </a:rPr>
-              <a:t>""</a:t>
-            </a:r>
-            <a:r>
-              <a:rPr lang="en-US" altLang="ko-KR" sz="1200" b="0" dirty="0">
-                <a:solidFill>
-                  <a:srgbClr val="ABB2BF"/>
-                </a:solidFill>
-                <a:effectLst/>
-                <a:latin typeface="D2Coding ligature" panose="020B0609020101020101" pitchFamily="49" charset="-127"/>
-                <a:ea typeface="D2Coding ligature" panose="020B0609020101020101" pitchFamily="49" charset="-127"/>
-              </a:rPr>
-              <a:t>){</a:t>
-            </a:r>
-          </a:p>
-          <a:p>
-            <a:pPr>
-              <a:lnSpc>
-                <a:spcPts val="1650"/>
-              </a:lnSpc>
-              <a:buNone/>
-            </a:pPr>
-            <a:r>
-              <a:rPr lang="en-US" altLang="ko-KR" sz="1200" b="0" dirty="0">
-                <a:solidFill>
-                  <a:srgbClr val="ABB2BF"/>
-                </a:solidFill>
-                <a:effectLst/>
-                <a:latin typeface="D2Coding ligature" panose="020B0609020101020101" pitchFamily="49" charset="-127"/>
-                <a:ea typeface="D2Coding ligature" panose="020B0609020101020101" pitchFamily="49" charset="-127"/>
-              </a:rPr>
-              <a:t>    </a:t>
-            </a:r>
-            <a:r>
-              <a:rPr lang="en-US" altLang="ko-KR" sz="1200" b="0" dirty="0">
-                <a:solidFill>
-                  <a:srgbClr val="56B6C2"/>
-                </a:solidFill>
-                <a:effectLst/>
-                <a:latin typeface="D2Coding ligature" panose="020B0609020101020101" pitchFamily="49" charset="-127"/>
-                <a:ea typeface="D2Coding ligature" panose="020B0609020101020101" pitchFamily="49" charset="-127"/>
-              </a:rPr>
-              <a:t>alert</a:t>
-            </a:r>
-            <a:r>
-              <a:rPr lang="en-US" altLang="ko-KR" sz="1200" b="0" dirty="0">
-                <a:solidFill>
-                  <a:srgbClr val="ABB2BF"/>
-                </a:solidFill>
-                <a:effectLst/>
-                <a:latin typeface="D2Coding ligature" panose="020B0609020101020101" pitchFamily="49" charset="-127"/>
-                <a:ea typeface="D2Coding ligature" panose="020B0609020101020101" pitchFamily="49" charset="-127"/>
-              </a:rPr>
-              <a:t>(</a:t>
-            </a:r>
-            <a:r>
-              <a:rPr lang="en-US" altLang="ko-KR" sz="1200" b="0" dirty="0">
-                <a:solidFill>
-                  <a:srgbClr val="98C379"/>
-                </a:solidFill>
-                <a:effectLst/>
-                <a:latin typeface="D2Coding ligature" panose="020B0609020101020101" pitchFamily="49" charset="-127"/>
-                <a:ea typeface="D2Coding ligature" panose="020B0609020101020101" pitchFamily="49" charset="-127"/>
-              </a:rPr>
-              <a:t>"</a:t>
-            </a:r>
-            <a:r>
-              <a:rPr lang="ko-KR" altLang="en-US" sz="1200" b="0" dirty="0">
-                <a:solidFill>
-                  <a:srgbClr val="98C379"/>
-                </a:solidFill>
-                <a:effectLst/>
-                <a:latin typeface="D2Coding ligature" panose="020B0609020101020101" pitchFamily="49" charset="-127"/>
-                <a:ea typeface="D2Coding ligature" panose="020B0609020101020101" pitchFamily="49" charset="-127"/>
-              </a:rPr>
-              <a:t>제목을 입력하세요</a:t>
-            </a:r>
-            <a:r>
-              <a:rPr lang="en-US" altLang="ko-KR" sz="1200" b="0" dirty="0">
-                <a:solidFill>
-                  <a:srgbClr val="98C379"/>
-                </a:solidFill>
-                <a:effectLst/>
-                <a:latin typeface="D2Coding ligature" panose="020B0609020101020101" pitchFamily="49" charset="-127"/>
-                <a:ea typeface="D2Coding ligature" panose="020B0609020101020101" pitchFamily="49" charset="-127"/>
-              </a:rPr>
-              <a:t>"</a:t>
-            </a:r>
-            <a:r>
-              <a:rPr lang="en-US" altLang="ko-KR" sz="1200" b="0" dirty="0">
-                <a:solidFill>
-                  <a:srgbClr val="ABB2BF"/>
-                </a:solidFill>
-                <a:effectLst/>
-                <a:latin typeface="D2Coding ligature" panose="020B0609020101020101" pitchFamily="49" charset="-127"/>
-                <a:ea typeface="D2Coding ligature" panose="020B0609020101020101" pitchFamily="49" charset="-127"/>
-              </a:rPr>
-              <a:t>);</a:t>
-            </a:r>
-          </a:p>
-          <a:p>
-            <a:pPr>
-              <a:lnSpc>
-                <a:spcPts val="1650"/>
-              </a:lnSpc>
-              <a:buNone/>
-            </a:pPr>
-            <a:r>
-              <a:rPr lang="en-US" altLang="ko-KR" sz="1200" b="0" dirty="0">
-                <a:solidFill>
-                  <a:srgbClr val="ABB2BF"/>
-                </a:solidFill>
-                <a:effectLst/>
-                <a:latin typeface="D2Coding ligature" panose="020B0609020101020101" pitchFamily="49" charset="-127"/>
-                <a:ea typeface="D2Coding ligature" panose="020B0609020101020101" pitchFamily="49" charset="-127"/>
-              </a:rPr>
-              <a:t>  }</a:t>
-            </a:r>
-            <a:r>
-              <a:rPr lang="en-US" altLang="ko-KR" sz="1200" b="0" dirty="0">
-                <a:solidFill>
-                  <a:srgbClr val="C678DD"/>
-                </a:solidFill>
-                <a:effectLst/>
-                <a:latin typeface="D2Coding ligature" panose="020B0609020101020101" pitchFamily="49" charset="-127"/>
-                <a:ea typeface="D2Coding ligature" panose="020B0609020101020101" pitchFamily="49" charset="-127"/>
-              </a:rPr>
-              <a:t>else</a:t>
-            </a:r>
-            <a:r>
-              <a:rPr lang="en-US" altLang="ko-KR" sz="1200" b="0" dirty="0">
-                <a:solidFill>
-                  <a:srgbClr val="ABB2BF"/>
-                </a:solidFill>
-                <a:effectLst/>
-                <a:latin typeface="D2Coding ligature" panose="020B0609020101020101" pitchFamily="49" charset="-127"/>
-                <a:ea typeface="D2Coding ligature" panose="020B0609020101020101" pitchFamily="49" charset="-127"/>
-              </a:rPr>
-              <a:t>{</a:t>
-            </a:r>
-          </a:p>
-          <a:p>
-            <a:pPr>
-              <a:lnSpc>
-                <a:spcPts val="1650"/>
-              </a:lnSpc>
-              <a:buNone/>
-            </a:pPr>
-            <a:r>
-              <a:rPr lang="en-US" altLang="ko-KR" sz="1200" b="0" dirty="0">
-                <a:solidFill>
-                  <a:srgbClr val="ABB2BF"/>
-                </a:solidFill>
-                <a:effectLst/>
-                <a:latin typeface="D2Coding ligature" panose="020B0609020101020101" pitchFamily="49" charset="-127"/>
-                <a:ea typeface="D2Coding ligature" panose="020B0609020101020101" pitchFamily="49" charset="-127"/>
-              </a:rPr>
-              <a:t>    </a:t>
-            </a:r>
-            <a:r>
-              <a:rPr lang="en-US" altLang="ko-KR" sz="1200" b="0" dirty="0">
-                <a:solidFill>
-                  <a:srgbClr val="56B6C2"/>
-                </a:solidFill>
-                <a:effectLst/>
-                <a:latin typeface="D2Coding ligature" panose="020B0609020101020101" pitchFamily="49" charset="-127"/>
-                <a:ea typeface="D2Coding ligature" panose="020B0609020101020101" pitchFamily="49" charset="-127"/>
-              </a:rPr>
-              <a:t>alert</a:t>
-            </a:r>
-            <a:r>
-              <a:rPr lang="en-US" altLang="ko-KR" sz="1200" b="0" dirty="0">
-                <a:solidFill>
-                  <a:srgbClr val="ABB2BF"/>
-                </a:solidFill>
-                <a:effectLst/>
-                <a:latin typeface="D2Coding ligature" panose="020B0609020101020101" pitchFamily="49" charset="-127"/>
-                <a:ea typeface="D2Coding ligature" panose="020B0609020101020101" pitchFamily="49" charset="-127"/>
-              </a:rPr>
-              <a:t>(</a:t>
-            </a:r>
-            <a:r>
-              <a:rPr lang="en-US" altLang="ko-KR" sz="1200" b="0" dirty="0">
-                <a:solidFill>
-                  <a:srgbClr val="98C379"/>
-                </a:solidFill>
-                <a:effectLst/>
-                <a:latin typeface="D2Coding ligature" panose="020B0609020101020101" pitchFamily="49" charset="-127"/>
-                <a:ea typeface="D2Coding ligature" panose="020B0609020101020101" pitchFamily="49" charset="-127"/>
-              </a:rPr>
-              <a:t>"</a:t>
-            </a:r>
-            <a:r>
-              <a:rPr lang="ko-KR" altLang="en-US" sz="1200" b="0" dirty="0">
-                <a:solidFill>
-                  <a:srgbClr val="98C379"/>
-                </a:solidFill>
-                <a:effectLst/>
-                <a:latin typeface="D2Coding ligature" panose="020B0609020101020101" pitchFamily="49" charset="-127"/>
-                <a:ea typeface="D2Coding ligature" panose="020B0609020101020101" pitchFamily="49" charset="-127"/>
-              </a:rPr>
-              <a:t>리뷰 등록을 완료했습니다</a:t>
-            </a:r>
-            <a:r>
-              <a:rPr lang="en-US" altLang="ko-KR" sz="1200" b="0" dirty="0">
-                <a:solidFill>
-                  <a:srgbClr val="98C379"/>
-                </a:solidFill>
-                <a:effectLst/>
-                <a:latin typeface="D2Coding ligature" panose="020B0609020101020101" pitchFamily="49" charset="-127"/>
-                <a:ea typeface="D2Coding ligature" panose="020B0609020101020101" pitchFamily="49" charset="-127"/>
-              </a:rPr>
-              <a:t>."</a:t>
-            </a:r>
-            <a:r>
-              <a:rPr lang="en-US" altLang="ko-KR" sz="1200" b="0" dirty="0">
-                <a:solidFill>
-                  <a:srgbClr val="ABB2BF"/>
-                </a:solidFill>
-                <a:effectLst/>
-                <a:latin typeface="D2Coding ligature" panose="020B0609020101020101" pitchFamily="49" charset="-127"/>
-                <a:ea typeface="D2Coding ligature" panose="020B0609020101020101" pitchFamily="49" charset="-127"/>
-              </a:rPr>
-              <a:t>);</a:t>
-            </a:r>
-          </a:p>
-          <a:p>
-            <a:pPr>
-              <a:lnSpc>
-                <a:spcPts val="1650"/>
-              </a:lnSpc>
-              <a:buNone/>
-            </a:pPr>
-            <a:r>
-              <a:rPr lang="en-US" altLang="ko-KR" sz="1200" b="0" dirty="0">
-                <a:solidFill>
-                  <a:srgbClr val="ABB2BF"/>
-                </a:solidFill>
-                <a:effectLst/>
-                <a:latin typeface="D2Coding ligature" panose="020B0609020101020101" pitchFamily="49" charset="-127"/>
-                <a:ea typeface="D2Coding ligature" panose="020B0609020101020101" pitchFamily="49" charset="-127"/>
-              </a:rPr>
-              <a:t>    </a:t>
-            </a:r>
-            <a:r>
-              <a:rPr lang="en-US" altLang="ko-KR" sz="1200" b="0" dirty="0" err="1">
-                <a:solidFill>
-                  <a:srgbClr val="E5C07B"/>
-                </a:solidFill>
-                <a:effectLst/>
-                <a:latin typeface="D2Coding ligature" panose="020B0609020101020101" pitchFamily="49" charset="-127"/>
-                <a:ea typeface="D2Coding ligature" panose="020B0609020101020101" pitchFamily="49" charset="-127"/>
-              </a:rPr>
-              <a:t>document</a:t>
-            </a:r>
-            <a:r>
-              <a:rPr lang="en-US" altLang="ko-KR" sz="1200" b="0" dirty="0" err="1">
-                <a:solidFill>
-                  <a:srgbClr val="ABB2BF"/>
-                </a:solidFill>
-                <a:effectLst/>
-                <a:latin typeface="D2Coding ligature" panose="020B0609020101020101" pitchFamily="49" charset="-127"/>
-                <a:ea typeface="D2Coding ligature" panose="020B0609020101020101" pitchFamily="49" charset="-127"/>
-              </a:rPr>
-              <a:t>.</a:t>
-            </a:r>
-            <a:r>
-              <a:rPr lang="en-US" altLang="ko-KR" sz="1200" b="0" dirty="0" err="1">
-                <a:solidFill>
-                  <a:srgbClr val="61AFEF"/>
-                </a:solidFill>
-                <a:effectLst/>
-                <a:latin typeface="D2Coding ligature" panose="020B0609020101020101" pitchFamily="49" charset="-127"/>
-                <a:ea typeface="D2Coding ligature" panose="020B0609020101020101" pitchFamily="49" charset="-127"/>
-              </a:rPr>
-              <a:t>querySelector</a:t>
-            </a:r>
-            <a:r>
-              <a:rPr lang="en-US" altLang="ko-KR" sz="1200" b="0" dirty="0">
-                <a:solidFill>
-                  <a:srgbClr val="ABB2BF"/>
-                </a:solidFill>
-                <a:effectLst/>
-                <a:latin typeface="D2Coding ligature" panose="020B0609020101020101" pitchFamily="49" charset="-127"/>
-                <a:ea typeface="D2Coding ligature" panose="020B0609020101020101" pitchFamily="49" charset="-127"/>
-              </a:rPr>
-              <a:t>(</a:t>
-            </a:r>
-            <a:r>
-              <a:rPr lang="en-US" altLang="ko-KR" sz="1200" b="0" dirty="0">
-                <a:solidFill>
-                  <a:srgbClr val="98C379"/>
-                </a:solidFill>
-                <a:effectLst/>
-                <a:latin typeface="D2Coding ligature" panose="020B0609020101020101" pitchFamily="49" charset="-127"/>
-                <a:ea typeface="D2Coding ligature" panose="020B0609020101020101" pitchFamily="49" charset="-127"/>
-              </a:rPr>
-              <a:t>".modal-	background"</a:t>
-            </a:r>
-            <a:r>
-              <a:rPr lang="en-US" altLang="ko-KR" sz="1200" b="0" dirty="0">
-                <a:solidFill>
-                  <a:srgbClr val="ABB2BF"/>
-                </a:solidFill>
-                <a:effectLst/>
-                <a:latin typeface="D2Coding ligature" panose="020B0609020101020101" pitchFamily="49" charset="-127"/>
-                <a:ea typeface="D2Coding ligature" panose="020B0609020101020101" pitchFamily="49" charset="-127"/>
-              </a:rPr>
-              <a:t>).</a:t>
-            </a:r>
-            <a:r>
-              <a:rPr lang="en-US" altLang="ko-KR" sz="1200" b="0" dirty="0" err="1">
-                <a:solidFill>
-                  <a:srgbClr val="E06C75"/>
-                </a:solidFill>
-                <a:effectLst/>
-                <a:latin typeface="D2Coding ligature" panose="020B0609020101020101" pitchFamily="49" charset="-127"/>
-                <a:ea typeface="D2Coding ligature" panose="020B0609020101020101" pitchFamily="49" charset="-127"/>
-              </a:rPr>
-              <a:t>classList</a:t>
-            </a:r>
-            <a:r>
-              <a:rPr lang="en-US" altLang="ko-KR" sz="1200" b="0" dirty="0" err="1">
-                <a:solidFill>
-                  <a:srgbClr val="ABB2BF"/>
-                </a:solidFill>
-                <a:effectLst/>
-                <a:latin typeface="D2Coding ligature" panose="020B0609020101020101" pitchFamily="49" charset="-127"/>
-                <a:ea typeface="D2Coding ligature" panose="020B0609020101020101" pitchFamily="49" charset="-127"/>
-              </a:rPr>
-              <a:t>.</a:t>
-            </a:r>
-            <a:r>
-              <a:rPr lang="en-US" altLang="ko-KR" sz="1200" b="0" dirty="0" err="1">
-                <a:solidFill>
-                  <a:srgbClr val="61AFEF"/>
-                </a:solidFill>
-                <a:effectLst/>
-                <a:latin typeface="D2Coding ligature" panose="020B0609020101020101" pitchFamily="49" charset="-127"/>
-                <a:ea typeface="D2Coding ligature" panose="020B0609020101020101" pitchFamily="49" charset="-127"/>
-              </a:rPr>
-              <a:t>remove</a:t>
-            </a:r>
-            <a:r>
-              <a:rPr lang="en-US" altLang="ko-KR" sz="1200" b="0" dirty="0">
-                <a:solidFill>
-                  <a:srgbClr val="ABB2BF"/>
-                </a:solidFill>
-                <a:effectLst/>
-                <a:latin typeface="D2Coding ligature" panose="020B0609020101020101" pitchFamily="49" charset="-127"/>
-                <a:ea typeface="D2Coding ligature" panose="020B0609020101020101" pitchFamily="49" charset="-127"/>
-              </a:rPr>
-              <a:t>(</a:t>
-            </a:r>
-            <a:r>
-              <a:rPr lang="en-US" altLang="ko-KR" sz="1200" b="0" dirty="0">
-                <a:solidFill>
-                  <a:srgbClr val="98C379"/>
-                </a:solidFill>
-                <a:effectLst/>
-                <a:latin typeface="D2Coding ligature" panose="020B0609020101020101" pitchFamily="49" charset="-127"/>
-                <a:ea typeface="D2Coding ligature" panose="020B0609020101020101" pitchFamily="49" charset="-127"/>
-              </a:rPr>
-              <a:t>"active"</a:t>
-            </a:r>
-            <a:r>
-              <a:rPr lang="en-US" altLang="ko-KR" sz="1200" b="0" dirty="0">
-                <a:solidFill>
-                  <a:srgbClr val="ABB2BF"/>
-                </a:solidFill>
-                <a:effectLst/>
-                <a:latin typeface="D2Coding ligature" panose="020B0609020101020101" pitchFamily="49" charset="-127"/>
-                <a:ea typeface="D2Coding ligature" panose="020B0609020101020101" pitchFamily="49" charset="-127"/>
-              </a:rPr>
-              <a:t>);</a:t>
-            </a:r>
-          </a:p>
-          <a:p>
-            <a:pPr>
-              <a:lnSpc>
-                <a:spcPts val="1650"/>
-              </a:lnSpc>
-              <a:buNone/>
-            </a:pPr>
-            <a:r>
-              <a:rPr lang="en-US" altLang="ko-KR" sz="1200" b="0" dirty="0">
-                <a:solidFill>
-                  <a:srgbClr val="ABB2BF"/>
-                </a:solidFill>
-                <a:effectLst/>
-                <a:latin typeface="D2Coding ligature" panose="020B0609020101020101" pitchFamily="49" charset="-127"/>
-                <a:ea typeface="D2Coding ligature" panose="020B0609020101020101" pitchFamily="49" charset="-127"/>
-              </a:rPr>
-              <a:t>  }</a:t>
-            </a:r>
-          </a:p>
-          <a:p>
-            <a:pPr>
-              <a:lnSpc>
-                <a:spcPts val="1650"/>
-              </a:lnSpc>
-              <a:buNone/>
-            </a:pPr>
-            <a:r>
-              <a:rPr lang="en-US" altLang="ko-KR" sz="1200" b="0" dirty="0">
-                <a:solidFill>
-                  <a:srgbClr val="ABB2BF"/>
-                </a:solidFill>
-                <a:effectLst/>
-                <a:latin typeface="D2Coding ligature" panose="020B0609020101020101" pitchFamily="49" charset="-127"/>
-                <a:ea typeface="D2Coding ligature" panose="020B0609020101020101" pitchFamily="49" charset="-127"/>
-              </a:rPr>
-              <a:t>}</a:t>
-            </a:r>
-          </a:p>
-        </p:txBody>
-      </p:sp>
-    </p:spTree>
-    <p:extLst>
-      <p:ext uri="{BB962C8B-B14F-4D97-AF65-F5344CB8AC3E}">
-        <p14:creationId xmlns:p14="http://schemas.microsoft.com/office/powerpoint/2010/main" val="807463599"/>
       </p:ext>
     </p:extLst>
   </p:cSld>
